--- a/public/videos/repositories/retro-new-games-api/retro-new-games-api-tech-preview.pptx
+++ b/public/videos/repositories/retro-new-games-api/retro-new-games-api-tech-preview.pptx
@@ -134,7 +134,7 @@
           <p:cNvPr id="2" name="タイトル 1">
             <a:extLst>
               <a:ext uri="{FF2B5EF4-FFF2-40B4-BE49-F238E27FC236}">
-                <a16:creationId xmlns:a16="http://schemas.microsoft.com/office/drawing/2014/main" id="{496F5364-8856-2385-F9DB-54EDCDF2502B}"/>
+                <a16:creationId xmlns:a16="http://schemas.microsoft.com/office/drawing/2014/main" id="{1CFAD7A4-06FE-A10F-1C9C-787B97A69D2C}"/>
               </a:ext>
             </a:extLst>
           </p:cNvPr>
@@ -171,7 +171,7 @@
           <p:cNvPr id="3" name="字幕 2">
             <a:extLst>
               <a:ext uri="{FF2B5EF4-FFF2-40B4-BE49-F238E27FC236}">
-                <a16:creationId xmlns:a16="http://schemas.microsoft.com/office/drawing/2014/main" id="{D05D266A-5509-804F-C929-7D472D625171}"/>
+                <a16:creationId xmlns:a16="http://schemas.microsoft.com/office/drawing/2014/main" id="{8B332A37-1B21-78D1-C841-A7372EC6B08C}"/>
               </a:ext>
             </a:extLst>
           </p:cNvPr>
@@ -241,7 +241,7 @@
           <p:cNvPr id="4" name="日付プレースホルダー 3">
             <a:extLst>
               <a:ext uri="{FF2B5EF4-FFF2-40B4-BE49-F238E27FC236}">
-                <a16:creationId xmlns:a16="http://schemas.microsoft.com/office/drawing/2014/main" id="{C020CAFE-2EBD-C10C-C4D2-F8160C1D0E5F}"/>
+                <a16:creationId xmlns:a16="http://schemas.microsoft.com/office/drawing/2014/main" id="{5E55F7E0-76B9-51EE-A98F-5B5D71A68E3B}"/>
               </a:ext>
             </a:extLst>
           </p:cNvPr>
@@ -257,7 +257,7 @@
           <a:bodyPr/>
           <a:lstStyle/>
           <a:p>
-            <a:fld id="{4B1134DF-AF89-48C8-8AE6-E91660A6F6C0}" type="datetimeFigureOut">
+            <a:fld id="{A790249F-FB65-43FE-B7F4-EC47FBA5CFDF}" type="datetimeFigureOut">
               <a:rPr kumimoji="1" lang="ja-JP" altLang="en-US" smtClean="0"/>
               <a:t>2026/7/30</a:t>
             </a:fld>
@@ -270,7 +270,7 @@
           <p:cNvPr id="5" name="フッター プレースホルダー 4">
             <a:extLst>
               <a:ext uri="{FF2B5EF4-FFF2-40B4-BE49-F238E27FC236}">
-                <a16:creationId xmlns:a16="http://schemas.microsoft.com/office/drawing/2014/main" id="{BDDE43BE-8753-3B3D-398F-DB5E65802A24}"/>
+                <a16:creationId xmlns:a16="http://schemas.microsoft.com/office/drawing/2014/main" id="{C8F7BC87-DE48-711E-BECB-1664C1DCF487}"/>
               </a:ext>
             </a:extLst>
           </p:cNvPr>
@@ -295,7 +295,7 @@
           <p:cNvPr id="6" name="スライド番号プレースホルダー 5">
             <a:extLst>
               <a:ext uri="{FF2B5EF4-FFF2-40B4-BE49-F238E27FC236}">
-                <a16:creationId xmlns:a16="http://schemas.microsoft.com/office/drawing/2014/main" id="{BAC8C111-FA21-9F60-F384-B9D68D1D9B9A}"/>
+                <a16:creationId xmlns:a16="http://schemas.microsoft.com/office/drawing/2014/main" id="{CB43D0BE-ED6E-8BDD-ABB2-5D998A73BAEE}"/>
               </a:ext>
             </a:extLst>
           </p:cNvPr>
@@ -311,7 +311,7 @@
           <a:bodyPr/>
           <a:lstStyle/>
           <a:p>
-            <a:fld id="{B1D4365D-5AA6-4759-8C33-05B7AC82BACA}" type="slidenum">
+            <a:fld id="{58B0269A-8420-4C54-ADE6-B4C01A886CD9}" type="slidenum">
               <a:rPr kumimoji="1" lang="ja-JP" altLang="en-US" smtClean="0"/>
               <a:t>‹#›</a:t>
             </a:fld>
@@ -322,7 +322,7 @@
     </p:spTree>
     <p:extLst>
       <p:ext uri="{BB962C8B-B14F-4D97-AF65-F5344CB8AC3E}">
-        <p14:creationId xmlns:p14="http://schemas.microsoft.com/office/powerpoint/2010/main" val="672775552"/>
+        <p14:creationId xmlns:p14="http://schemas.microsoft.com/office/powerpoint/2010/main" val="2175856878"/>
       </p:ext>
     </p:extLst>
   </p:cSld>
@@ -354,7 +354,7 @@
           <p:cNvPr id="2" name="タイトル 1">
             <a:extLst>
               <a:ext uri="{FF2B5EF4-FFF2-40B4-BE49-F238E27FC236}">
-                <a16:creationId xmlns:a16="http://schemas.microsoft.com/office/drawing/2014/main" id="{A72654F8-BDC9-8A20-52EF-8D7B122D01B6}"/>
+                <a16:creationId xmlns:a16="http://schemas.microsoft.com/office/drawing/2014/main" id="{BA11A97C-DF45-B648-AC4B-5E30DDF577E8}"/>
               </a:ext>
             </a:extLst>
           </p:cNvPr>
@@ -382,7 +382,7 @@
           <p:cNvPr id="3" name="縦書きテキスト プレースホルダー 2">
             <a:extLst>
               <a:ext uri="{FF2B5EF4-FFF2-40B4-BE49-F238E27FC236}">
-                <a16:creationId xmlns:a16="http://schemas.microsoft.com/office/drawing/2014/main" id="{354E69A6-85B2-6F3B-331F-B4BF888DBBF8}"/>
+                <a16:creationId xmlns:a16="http://schemas.microsoft.com/office/drawing/2014/main" id="{611EF9A5-848A-EB6A-DCC6-31BDFE1EA5D2}"/>
               </a:ext>
             </a:extLst>
           </p:cNvPr>
@@ -471,7 +471,7 @@
           <p:cNvPr id="4" name="日付プレースホルダー 3">
             <a:extLst>
               <a:ext uri="{FF2B5EF4-FFF2-40B4-BE49-F238E27FC236}">
-                <a16:creationId xmlns:a16="http://schemas.microsoft.com/office/drawing/2014/main" id="{EB72D5F4-5B10-57E5-3FEE-053392ED39B3}"/>
+                <a16:creationId xmlns:a16="http://schemas.microsoft.com/office/drawing/2014/main" id="{50C48183-C53C-EFBB-CD55-B36259E83CBE}"/>
               </a:ext>
             </a:extLst>
           </p:cNvPr>
@@ -487,7 +487,7 @@
           <a:bodyPr/>
           <a:lstStyle/>
           <a:p>
-            <a:fld id="{4B1134DF-AF89-48C8-8AE6-E91660A6F6C0}" type="datetimeFigureOut">
+            <a:fld id="{A790249F-FB65-43FE-B7F4-EC47FBA5CFDF}" type="datetimeFigureOut">
               <a:rPr kumimoji="1" lang="ja-JP" altLang="en-US" smtClean="0"/>
               <a:t>2026/7/30</a:t>
             </a:fld>
@@ -500,7 +500,7 @@
           <p:cNvPr id="5" name="フッター プレースホルダー 4">
             <a:extLst>
               <a:ext uri="{FF2B5EF4-FFF2-40B4-BE49-F238E27FC236}">
-                <a16:creationId xmlns:a16="http://schemas.microsoft.com/office/drawing/2014/main" id="{ADC2AAA7-28DC-C9B9-DB80-08B952A61E00}"/>
+                <a16:creationId xmlns:a16="http://schemas.microsoft.com/office/drawing/2014/main" id="{5B7FF308-BF4C-F70F-BDD5-5AE9E43B8088}"/>
               </a:ext>
             </a:extLst>
           </p:cNvPr>
@@ -525,7 +525,7 @@
           <p:cNvPr id="6" name="スライド番号プレースホルダー 5">
             <a:extLst>
               <a:ext uri="{FF2B5EF4-FFF2-40B4-BE49-F238E27FC236}">
-                <a16:creationId xmlns:a16="http://schemas.microsoft.com/office/drawing/2014/main" id="{A402B9DC-4228-AC4B-9A4D-03C25EDCB799}"/>
+                <a16:creationId xmlns:a16="http://schemas.microsoft.com/office/drawing/2014/main" id="{A1C3C5FB-7686-21BE-CB5E-B4B49D053DDE}"/>
               </a:ext>
             </a:extLst>
           </p:cNvPr>
@@ -541,7 +541,7 @@
           <a:bodyPr/>
           <a:lstStyle/>
           <a:p>
-            <a:fld id="{B1D4365D-5AA6-4759-8C33-05B7AC82BACA}" type="slidenum">
+            <a:fld id="{58B0269A-8420-4C54-ADE6-B4C01A886CD9}" type="slidenum">
               <a:rPr kumimoji="1" lang="ja-JP" altLang="en-US" smtClean="0"/>
               <a:t>‹#›</a:t>
             </a:fld>
@@ -552,7 +552,7 @@
     </p:spTree>
     <p:extLst>
       <p:ext uri="{BB962C8B-B14F-4D97-AF65-F5344CB8AC3E}">
-        <p14:creationId xmlns:p14="http://schemas.microsoft.com/office/powerpoint/2010/main" val="2919973398"/>
+        <p14:creationId xmlns:p14="http://schemas.microsoft.com/office/powerpoint/2010/main" val="3021025414"/>
       </p:ext>
     </p:extLst>
   </p:cSld>
@@ -584,7 +584,7 @@
           <p:cNvPr id="2" name="縦書きタイトル 1">
             <a:extLst>
               <a:ext uri="{FF2B5EF4-FFF2-40B4-BE49-F238E27FC236}">
-                <a16:creationId xmlns:a16="http://schemas.microsoft.com/office/drawing/2014/main" id="{98AE23BD-8DF3-E4DC-A57A-70E2499879E8}"/>
+                <a16:creationId xmlns:a16="http://schemas.microsoft.com/office/drawing/2014/main" id="{D7C85415-478F-5D19-765A-CBBB68C1622F}"/>
               </a:ext>
             </a:extLst>
           </p:cNvPr>
@@ -617,7 +617,7 @@
           <p:cNvPr id="3" name="縦書きテキスト プレースホルダー 2">
             <a:extLst>
               <a:ext uri="{FF2B5EF4-FFF2-40B4-BE49-F238E27FC236}">
-                <a16:creationId xmlns:a16="http://schemas.microsoft.com/office/drawing/2014/main" id="{D701D01C-A053-2E67-6860-D40014EA3FCA}"/>
+                <a16:creationId xmlns:a16="http://schemas.microsoft.com/office/drawing/2014/main" id="{BD248DA4-5B0C-86A2-D8CC-9A334039ECD9}"/>
               </a:ext>
             </a:extLst>
           </p:cNvPr>
@@ -711,7 +711,7 @@
           <p:cNvPr id="4" name="日付プレースホルダー 3">
             <a:extLst>
               <a:ext uri="{FF2B5EF4-FFF2-40B4-BE49-F238E27FC236}">
-                <a16:creationId xmlns:a16="http://schemas.microsoft.com/office/drawing/2014/main" id="{70033FD7-AD22-B58F-2E62-7B156CD2148F}"/>
+                <a16:creationId xmlns:a16="http://schemas.microsoft.com/office/drawing/2014/main" id="{7582D689-9163-923F-7FF9-DE2B57E41A6E}"/>
               </a:ext>
             </a:extLst>
           </p:cNvPr>
@@ -727,7 +727,7 @@
           <a:bodyPr/>
           <a:lstStyle/>
           <a:p>
-            <a:fld id="{4B1134DF-AF89-48C8-8AE6-E91660A6F6C0}" type="datetimeFigureOut">
+            <a:fld id="{A790249F-FB65-43FE-B7F4-EC47FBA5CFDF}" type="datetimeFigureOut">
               <a:rPr kumimoji="1" lang="ja-JP" altLang="en-US" smtClean="0"/>
               <a:t>2026/7/30</a:t>
             </a:fld>
@@ -740,7 +740,7 @@
           <p:cNvPr id="5" name="フッター プレースホルダー 4">
             <a:extLst>
               <a:ext uri="{FF2B5EF4-FFF2-40B4-BE49-F238E27FC236}">
-                <a16:creationId xmlns:a16="http://schemas.microsoft.com/office/drawing/2014/main" id="{AFABFC1F-FAA1-FF99-441E-71DF8BAE4DF3}"/>
+                <a16:creationId xmlns:a16="http://schemas.microsoft.com/office/drawing/2014/main" id="{200BFDD0-D6AB-DBE8-F882-451B716AFA95}"/>
               </a:ext>
             </a:extLst>
           </p:cNvPr>
@@ -765,7 +765,7 @@
           <p:cNvPr id="6" name="スライド番号プレースホルダー 5">
             <a:extLst>
               <a:ext uri="{FF2B5EF4-FFF2-40B4-BE49-F238E27FC236}">
-                <a16:creationId xmlns:a16="http://schemas.microsoft.com/office/drawing/2014/main" id="{BCEAB747-441A-604A-2BD6-2D956992785D}"/>
+                <a16:creationId xmlns:a16="http://schemas.microsoft.com/office/drawing/2014/main" id="{FDFEC0E8-47E7-C21C-F7C3-6A5AC488BBEB}"/>
               </a:ext>
             </a:extLst>
           </p:cNvPr>
@@ -781,7 +781,7 @@
           <a:bodyPr/>
           <a:lstStyle/>
           <a:p>
-            <a:fld id="{B1D4365D-5AA6-4759-8C33-05B7AC82BACA}" type="slidenum">
+            <a:fld id="{58B0269A-8420-4C54-ADE6-B4C01A886CD9}" type="slidenum">
               <a:rPr kumimoji="1" lang="ja-JP" altLang="en-US" smtClean="0"/>
               <a:t>‹#›</a:t>
             </a:fld>
@@ -792,7 +792,7 @@
     </p:spTree>
     <p:extLst>
       <p:ext uri="{BB962C8B-B14F-4D97-AF65-F5344CB8AC3E}">
-        <p14:creationId xmlns:p14="http://schemas.microsoft.com/office/powerpoint/2010/main" val="1593767517"/>
+        <p14:creationId xmlns:p14="http://schemas.microsoft.com/office/powerpoint/2010/main" val="3357541299"/>
       </p:ext>
     </p:extLst>
   </p:cSld>
@@ -824,7 +824,7 @@
           <p:cNvPr id="2" name="タイトル 1">
             <a:extLst>
               <a:ext uri="{FF2B5EF4-FFF2-40B4-BE49-F238E27FC236}">
-                <a16:creationId xmlns:a16="http://schemas.microsoft.com/office/drawing/2014/main" id="{18388099-9FE1-F3C5-F4BD-23F645FDC5F4}"/>
+                <a16:creationId xmlns:a16="http://schemas.microsoft.com/office/drawing/2014/main" id="{BA811693-BDEE-06C3-BB89-818D7BDCCF9F}"/>
               </a:ext>
             </a:extLst>
           </p:cNvPr>
@@ -852,7 +852,7 @@
           <p:cNvPr id="3" name="コンテンツ プレースホルダー 2">
             <a:extLst>
               <a:ext uri="{FF2B5EF4-FFF2-40B4-BE49-F238E27FC236}">
-                <a16:creationId xmlns:a16="http://schemas.microsoft.com/office/drawing/2014/main" id="{F1056708-D34F-FC02-5051-B5712B78995C}"/>
+                <a16:creationId xmlns:a16="http://schemas.microsoft.com/office/drawing/2014/main" id="{C4FF566F-CEDF-8F6A-4AFB-090C931291F3}"/>
               </a:ext>
             </a:extLst>
           </p:cNvPr>
@@ -941,7 +941,7 @@
           <p:cNvPr id="4" name="日付プレースホルダー 3">
             <a:extLst>
               <a:ext uri="{FF2B5EF4-FFF2-40B4-BE49-F238E27FC236}">
-                <a16:creationId xmlns:a16="http://schemas.microsoft.com/office/drawing/2014/main" id="{1E66270C-266A-C81C-55F1-16AFAF844F37}"/>
+                <a16:creationId xmlns:a16="http://schemas.microsoft.com/office/drawing/2014/main" id="{90B16EE2-D8F8-AADB-D14C-AD92A7F70019}"/>
               </a:ext>
             </a:extLst>
           </p:cNvPr>
@@ -957,7 +957,7 @@
           <a:bodyPr/>
           <a:lstStyle/>
           <a:p>
-            <a:fld id="{4B1134DF-AF89-48C8-8AE6-E91660A6F6C0}" type="datetimeFigureOut">
+            <a:fld id="{A790249F-FB65-43FE-B7F4-EC47FBA5CFDF}" type="datetimeFigureOut">
               <a:rPr kumimoji="1" lang="ja-JP" altLang="en-US" smtClean="0"/>
               <a:t>2026/7/30</a:t>
             </a:fld>
@@ -970,7 +970,7 @@
           <p:cNvPr id="5" name="フッター プレースホルダー 4">
             <a:extLst>
               <a:ext uri="{FF2B5EF4-FFF2-40B4-BE49-F238E27FC236}">
-                <a16:creationId xmlns:a16="http://schemas.microsoft.com/office/drawing/2014/main" id="{23DF74DA-05B2-771B-2F45-85AB66CFAE52}"/>
+                <a16:creationId xmlns:a16="http://schemas.microsoft.com/office/drawing/2014/main" id="{B1776D94-C677-4AFB-57C6-E1E8EB494C2A}"/>
               </a:ext>
             </a:extLst>
           </p:cNvPr>
@@ -995,7 +995,7 @@
           <p:cNvPr id="6" name="スライド番号プレースホルダー 5">
             <a:extLst>
               <a:ext uri="{FF2B5EF4-FFF2-40B4-BE49-F238E27FC236}">
-                <a16:creationId xmlns:a16="http://schemas.microsoft.com/office/drawing/2014/main" id="{D2B36DA7-733A-4319-8491-EBD4860A06FF}"/>
+                <a16:creationId xmlns:a16="http://schemas.microsoft.com/office/drawing/2014/main" id="{21A9A45F-ED6D-F3C0-B231-70D0A9F63EA2}"/>
               </a:ext>
             </a:extLst>
           </p:cNvPr>
@@ -1011,7 +1011,7 @@
           <a:bodyPr/>
           <a:lstStyle/>
           <a:p>
-            <a:fld id="{B1D4365D-5AA6-4759-8C33-05B7AC82BACA}" type="slidenum">
+            <a:fld id="{58B0269A-8420-4C54-ADE6-B4C01A886CD9}" type="slidenum">
               <a:rPr kumimoji="1" lang="ja-JP" altLang="en-US" smtClean="0"/>
               <a:t>‹#›</a:t>
             </a:fld>
@@ -1022,7 +1022,7 @@
     </p:spTree>
     <p:extLst>
       <p:ext uri="{BB962C8B-B14F-4D97-AF65-F5344CB8AC3E}">
-        <p14:creationId xmlns:p14="http://schemas.microsoft.com/office/powerpoint/2010/main" val="3991663007"/>
+        <p14:creationId xmlns:p14="http://schemas.microsoft.com/office/powerpoint/2010/main" val="1872503034"/>
       </p:ext>
     </p:extLst>
   </p:cSld>
@@ -1054,7 +1054,7 @@
           <p:cNvPr id="2" name="タイトル 1">
             <a:extLst>
               <a:ext uri="{FF2B5EF4-FFF2-40B4-BE49-F238E27FC236}">
-                <a16:creationId xmlns:a16="http://schemas.microsoft.com/office/drawing/2014/main" id="{AE2CAD2F-1756-23A6-920D-52F17F06B488}"/>
+                <a16:creationId xmlns:a16="http://schemas.microsoft.com/office/drawing/2014/main" id="{64703178-5B00-6AD8-05A5-EC025FD03D27}"/>
               </a:ext>
             </a:extLst>
           </p:cNvPr>
@@ -1091,7 +1091,7 @@
           <p:cNvPr id="3" name="テキスト プレースホルダー 2">
             <a:extLst>
               <a:ext uri="{FF2B5EF4-FFF2-40B4-BE49-F238E27FC236}">
-                <a16:creationId xmlns:a16="http://schemas.microsoft.com/office/drawing/2014/main" id="{91711F40-7874-1A06-EDA1-022D1ED413E4}"/>
+                <a16:creationId xmlns:a16="http://schemas.microsoft.com/office/drawing/2014/main" id="{E16EAC7F-7993-539D-49FF-C17807DA6D26}"/>
               </a:ext>
             </a:extLst>
           </p:cNvPr>
@@ -1216,7 +1216,7 @@
           <p:cNvPr id="4" name="日付プレースホルダー 3">
             <a:extLst>
               <a:ext uri="{FF2B5EF4-FFF2-40B4-BE49-F238E27FC236}">
-                <a16:creationId xmlns:a16="http://schemas.microsoft.com/office/drawing/2014/main" id="{130C55D4-1D66-AFD3-39E0-A2CF47EE719B}"/>
+                <a16:creationId xmlns:a16="http://schemas.microsoft.com/office/drawing/2014/main" id="{0078C16B-B5A7-1866-4C86-C35E9F103BA2}"/>
               </a:ext>
             </a:extLst>
           </p:cNvPr>
@@ -1232,7 +1232,7 @@
           <a:bodyPr/>
           <a:lstStyle/>
           <a:p>
-            <a:fld id="{4B1134DF-AF89-48C8-8AE6-E91660A6F6C0}" type="datetimeFigureOut">
+            <a:fld id="{A790249F-FB65-43FE-B7F4-EC47FBA5CFDF}" type="datetimeFigureOut">
               <a:rPr kumimoji="1" lang="ja-JP" altLang="en-US" smtClean="0"/>
               <a:t>2026/7/30</a:t>
             </a:fld>
@@ -1245,7 +1245,7 @@
           <p:cNvPr id="5" name="フッター プレースホルダー 4">
             <a:extLst>
               <a:ext uri="{FF2B5EF4-FFF2-40B4-BE49-F238E27FC236}">
-                <a16:creationId xmlns:a16="http://schemas.microsoft.com/office/drawing/2014/main" id="{34358670-2E09-002D-3DB9-3FD55A91D809}"/>
+                <a16:creationId xmlns:a16="http://schemas.microsoft.com/office/drawing/2014/main" id="{43134A9E-4ADB-2E3B-432A-92B1C8BD1B80}"/>
               </a:ext>
             </a:extLst>
           </p:cNvPr>
@@ -1270,7 +1270,7 @@
           <p:cNvPr id="6" name="スライド番号プレースホルダー 5">
             <a:extLst>
               <a:ext uri="{FF2B5EF4-FFF2-40B4-BE49-F238E27FC236}">
-                <a16:creationId xmlns:a16="http://schemas.microsoft.com/office/drawing/2014/main" id="{F2935C4C-623F-D04A-025C-FD5BFD5F0E47}"/>
+                <a16:creationId xmlns:a16="http://schemas.microsoft.com/office/drawing/2014/main" id="{2F91CA58-6156-845F-4398-5F4531D4B44C}"/>
               </a:ext>
             </a:extLst>
           </p:cNvPr>
@@ -1286,7 +1286,7 @@
           <a:bodyPr/>
           <a:lstStyle/>
           <a:p>
-            <a:fld id="{B1D4365D-5AA6-4759-8C33-05B7AC82BACA}" type="slidenum">
+            <a:fld id="{58B0269A-8420-4C54-ADE6-B4C01A886CD9}" type="slidenum">
               <a:rPr kumimoji="1" lang="ja-JP" altLang="en-US" smtClean="0"/>
               <a:t>‹#›</a:t>
             </a:fld>
@@ -1297,7 +1297,7 @@
     </p:spTree>
     <p:extLst>
       <p:ext uri="{BB962C8B-B14F-4D97-AF65-F5344CB8AC3E}">
-        <p14:creationId xmlns:p14="http://schemas.microsoft.com/office/powerpoint/2010/main" val="2713423046"/>
+        <p14:creationId xmlns:p14="http://schemas.microsoft.com/office/powerpoint/2010/main" val="4263522135"/>
       </p:ext>
     </p:extLst>
   </p:cSld>
@@ -1329,7 +1329,7 @@
           <p:cNvPr id="2" name="タイトル 1">
             <a:extLst>
               <a:ext uri="{FF2B5EF4-FFF2-40B4-BE49-F238E27FC236}">
-                <a16:creationId xmlns:a16="http://schemas.microsoft.com/office/drawing/2014/main" id="{79E0AA64-73A7-59F7-EB8C-911B7264C1C3}"/>
+                <a16:creationId xmlns:a16="http://schemas.microsoft.com/office/drawing/2014/main" id="{0F56C25C-D530-71D8-9EB1-256457623A7C}"/>
               </a:ext>
             </a:extLst>
           </p:cNvPr>
@@ -1357,7 +1357,7 @@
           <p:cNvPr id="3" name="コンテンツ プレースホルダー 2">
             <a:extLst>
               <a:ext uri="{FF2B5EF4-FFF2-40B4-BE49-F238E27FC236}">
-                <a16:creationId xmlns:a16="http://schemas.microsoft.com/office/drawing/2014/main" id="{14B640AB-75B4-6A84-2620-064B805F522E}"/>
+                <a16:creationId xmlns:a16="http://schemas.microsoft.com/office/drawing/2014/main" id="{C3D3FAA5-7A79-84B8-4DAE-0C4A7E177405}"/>
               </a:ext>
             </a:extLst>
           </p:cNvPr>
@@ -1451,7 +1451,7 @@
           <p:cNvPr id="4" name="コンテンツ プレースホルダー 3">
             <a:extLst>
               <a:ext uri="{FF2B5EF4-FFF2-40B4-BE49-F238E27FC236}">
-                <a16:creationId xmlns:a16="http://schemas.microsoft.com/office/drawing/2014/main" id="{B31EA196-64D1-4F42-F975-36064BC7A0DB}"/>
+                <a16:creationId xmlns:a16="http://schemas.microsoft.com/office/drawing/2014/main" id="{3865D67E-0093-F8EC-C3B8-1C62C1710EAF}"/>
               </a:ext>
             </a:extLst>
           </p:cNvPr>
@@ -1545,7 +1545,7 @@
           <p:cNvPr id="5" name="日付プレースホルダー 4">
             <a:extLst>
               <a:ext uri="{FF2B5EF4-FFF2-40B4-BE49-F238E27FC236}">
-                <a16:creationId xmlns:a16="http://schemas.microsoft.com/office/drawing/2014/main" id="{C17557D3-A60E-06FF-C3B8-D89B20BA487D}"/>
+                <a16:creationId xmlns:a16="http://schemas.microsoft.com/office/drawing/2014/main" id="{30148A18-1997-F20C-1B00-A407A310DCBA}"/>
               </a:ext>
             </a:extLst>
           </p:cNvPr>
@@ -1561,7 +1561,7 @@
           <a:bodyPr/>
           <a:lstStyle/>
           <a:p>
-            <a:fld id="{4B1134DF-AF89-48C8-8AE6-E91660A6F6C0}" type="datetimeFigureOut">
+            <a:fld id="{A790249F-FB65-43FE-B7F4-EC47FBA5CFDF}" type="datetimeFigureOut">
               <a:rPr kumimoji="1" lang="ja-JP" altLang="en-US" smtClean="0"/>
               <a:t>2026/7/30</a:t>
             </a:fld>
@@ -1574,7 +1574,7 @@
           <p:cNvPr id="6" name="フッター プレースホルダー 5">
             <a:extLst>
               <a:ext uri="{FF2B5EF4-FFF2-40B4-BE49-F238E27FC236}">
-                <a16:creationId xmlns:a16="http://schemas.microsoft.com/office/drawing/2014/main" id="{DF2E1EA9-DE0E-0B2E-7DE8-9E827DA08546}"/>
+                <a16:creationId xmlns:a16="http://schemas.microsoft.com/office/drawing/2014/main" id="{EAC18B17-BEFA-A28F-B4DF-27F3ECDAA3A5}"/>
               </a:ext>
             </a:extLst>
           </p:cNvPr>
@@ -1599,7 +1599,7 @@
           <p:cNvPr id="7" name="スライド番号プレースホルダー 6">
             <a:extLst>
               <a:ext uri="{FF2B5EF4-FFF2-40B4-BE49-F238E27FC236}">
-                <a16:creationId xmlns:a16="http://schemas.microsoft.com/office/drawing/2014/main" id="{9718E4F8-A515-E719-2817-EF2103CDC1C4}"/>
+                <a16:creationId xmlns:a16="http://schemas.microsoft.com/office/drawing/2014/main" id="{62B10261-E973-9443-DFA6-BA753625AC0A}"/>
               </a:ext>
             </a:extLst>
           </p:cNvPr>
@@ -1615,7 +1615,7 @@
           <a:bodyPr/>
           <a:lstStyle/>
           <a:p>
-            <a:fld id="{B1D4365D-5AA6-4759-8C33-05B7AC82BACA}" type="slidenum">
+            <a:fld id="{58B0269A-8420-4C54-ADE6-B4C01A886CD9}" type="slidenum">
               <a:rPr kumimoji="1" lang="ja-JP" altLang="en-US" smtClean="0"/>
               <a:t>‹#›</a:t>
             </a:fld>
@@ -1626,7 +1626,7 @@
     </p:spTree>
     <p:extLst>
       <p:ext uri="{BB962C8B-B14F-4D97-AF65-F5344CB8AC3E}">
-        <p14:creationId xmlns:p14="http://schemas.microsoft.com/office/powerpoint/2010/main" val="3253858544"/>
+        <p14:creationId xmlns:p14="http://schemas.microsoft.com/office/powerpoint/2010/main" val="3663521146"/>
       </p:ext>
     </p:extLst>
   </p:cSld>
@@ -1658,7 +1658,7 @@
           <p:cNvPr id="2" name="タイトル 1">
             <a:extLst>
               <a:ext uri="{FF2B5EF4-FFF2-40B4-BE49-F238E27FC236}">
-                <a16:creationId xmlns:a16="http://schemas.microsoft.com/office/drawing/2014/main" id="{9011F429-B619-6378-8873-0F0948D69492}"/>
+                <a16:creationId xmlns:a16="http://schemas.microsoft.com/office/drawing/2014/main" id="{6018832A-1176-C4A5-74D0-644C65D24CA1}"/>
               </a:ext>
             </a:extLst>
           </p:cNvPr>
@@ -1691,7 +1691,7 @@
           <p:cNvPr id="3" name="テキスト プレースホルダー 2">
             <a:extLst>
               <a:ext uri="{FF2B5EF4-FFF2-40B4-BE49-F238E27FC236}">
-                <a16:creationId xmlns:a16="http://schemas.microsoft.com/office/drawing/2014/main" id="{62B0BF5E-CCF0-3744-D64C-AB6AA1B0B34A}"/>
+                <a16:creationId xmlns:a16="http://schemas.microsoft.com/office/drawing/2014/main" id="{7CB0BDC9-DDD1-1008-B9C1-ABC30AD1097B}"/>
               </a:ext>
             </a:extLst>
           </p:cNvPr>
@@ -1762,7 +1762,7 @@
           <p:cNvPr id="4" name="コンテンツ プレースホルダー 3">
             <a:extLst>
               <a:ext uri="{FF2B5EF4-FFF2-40B4-BE49-F238E27FC236}">
-                <a16:creationId xmlns:a16="http://schemas.microsoft.com/office/drawing/2014/main" id="{256E7E04-62D6-1FF4-9642-27EEE041FD31}"/>
+                <a16:creationId xmlns:a16="http://schemas.microsoft.com/office/drawing/2014/main" id="{7DEE7334-3BC0-DF69-E87E-72E6DA66341C}"/>
               </a:ext>
             </a:extLst>
           </p:cNvPr>
@@ -1856,7 +1856,7 @@
           <p:cNvPr id="5" name="テキスト プレースホルダー 4">
             <a:extLst>
               <a:ext uri="{FF2B5EF4-FFF2-40B4-BE49-F238E27FC236}">
-                <a16:creationId xmlns:a16="http://schemas.microsoft.com/office/drawing/2014/main" id="{384C0D14-1EFE-49C8-0D00-DF04C85363B1}"/>
+                <a16:creationId xmlns:a16="http://schemas.microsoft.com/office/drawing/2014/main" id="{C6F4D1A0-9D96-2C1B-1648-051262A24385}"/>
               </a:ext>
             </a:extLst>
           </p:cNvPr>
@@ -1927,7 +1927,7 @@
           <p:cNvPr id="6" name="コンテンツ プレースホルダー 5">
             <a:extLst>
               <a:ext uri="{FF2B5EF4-FFF2-40B4-BE49-F238E27FC236}">
-                <a16:creationId xmlns:a16="http://schemas.microsoft.com/office/drawing/2014/main" id="{346C4CAD-4F5D-DED9-A2F2-66EABAFB88C4}"/>
+                <a16:creationId xmlns:a16="http://schemas.microsoft.com/office/drawing/2014/main" id="{70EF0038-535C-92FE-536C-F4456D39E64D}"/>
               </a:ext>
             </a:extLst>
           </p:cNvPr>
@@ -2021,7 +2021,7 @@
           <p:cNvPr id="7" name="日付プレースホルダー 6">
             <a:extLst>
               <a:ext uri="{FF2B5EF4-FFF2-40B4-BE49-F238E27FC236}">
-                <a16:creationId xmlns:a16="http://schemas.microsoft.com/office/drawing/2014/main" id="{A93522EB-F32D-9793-F906-A8AAFA9CA6E2}"/>
+                <a16:creationId xmlns:a16="http://schemas.microsoft.com/office/drawing/2014/main" id="{49291720-23C6-FAF0-2460-CD8E28FD3267}"/>
               </a:ext>
             </a:extLst>
           </p:cNvPr>
@@ -2037,7 +2037,7 @@
           <a:bodyPr/>
           <a:lstStyle/>
           <a:p>
-            <a:fld id="{4B1134DF-AF89-48C8-8AE6-E91660A6F6C0}" type="datetimeFigureOut">
+            <a:fld id="{A790249F-FB65-43FE-B7F4-EC47FBA5CFDF}" type="datetimeFigureOut">
               <a:rPr kumimoji="1" lang="ja-JP" altLang="en-US" smtClean="0"/>
               <a:t>2026/7/30</a:t>
             </a:fld>
@@ -2050,7 +2050,7 @@
           <p:cNvPr id="8" name="フッター プレースホルダー 7">
             <a:extLst>
               <a:ext uri="{FF2B5EF4-FFF2-40B4-BE49-F238E27FC236}">
-                <a16:creationId xmlns:a16="http://schemas.microsoft.com/office/drawing/2014/main" id="{3B8910A3-C771-0CE0-3BFE-7D08BA7E0EE1}"/>
+                <a16:creationId xmlns:a16="http://schemas.microsoft.com/office/drawing/2014/main" id="{C6F3CB6F-6E23-C2B4-F736-5474849F9E7A}"/>
               </a:ext>
             </a:extLst>
           </p:cNvPr>
@@ -2075,7 +2075,7 @@
           <p:cNvPr id="9" name="スライド番号プレースホルダー 8">
             <a:extLst>
               <a:ext uri="{FF2B5EF4-FFF2-40B4-BE49-F238E27FC236}">
-                <a16:creationId xmlns:a16="http://schemas.microsoft.com/office/drawing/2014/main" id="{F0B8122D-C090-717F-FC90-ACD11E34F522}"/>
+                <a16:creationId xmlns:a16="http://schemas.microsoft.com/office/drawing/2014/main" id="{A814D24E-181B-DAA4-1645-1D5EA9E8EFCB}"/>
               </a:ext>
             </a:extLst>
           </p:cNvPr>
@@ -2091,7 +2091,7 @@
           <a:bodyPr/>
           <a:lstStyle/>
           <a:p>
-            <a:fld id="{B1D4365D-5AA6-4759-8C33-05B7AC82BACA}" type="slidenum">
+            <a:fld id="{58B0269A-8420-4C54-ADE6-B4C01A886CD9}" type="slidenum">
               <a:rPr kumimoji="1" lang="ja-JP" altLang="en-US" smtClean="0"/>
               <a:t>‹#›</a:t>
             </a:fld>
@@ -2102,7 +2102,7 @@
     </p:spTree>
     <p:extLst>
       <p:ext uri="{BB962C8B-B14F-4D97-AF65-F5344CB8AC3E}">
-        <p14:creationId xmlns:p14="http://schemas.microsoft.com/office/powerpoint/2010/main" val="1097127097"/>
+        <p14:creationId xmlns:p14="http://schemas.microsoft.com/office/powerpoint/2010/main" val="2050892874"/>
       </p:ext>
     </p:extLst>
   </p:cSld>
@@ -2134,7 +2134,7 @@
           <p:cNvPr id="2" name="タイトル 1">
             <a:extLst>
               <a:ext uri="{FF2B5EF4-FFF2-40B4-BE49-F238E27FC236}">
-                <a16:creationId xmlns:a16="http://schemas.microsoft.com/office/drawing/2014/main" id="{1E1E17D1-1F00-2C4B-E02C-B8E7B260250F}"/>
+                <a16:creationId xmlns:a16="http://schemas.microsoft.com/office/drawing/2014/main" id="{C61711EF-F2B7-F781-5A26-39336C0A836A}"/>
               </a:ext>
             </a:extLst>
           </p:cNvPr>
@@ -2162,7 +2162,7 @@
           <p:cNvPr id="3" name="日付プレースホルダー 2">
             <a:extLst>
               <a:ext uri="{FF2B5EF4-FFF2-40B4-BE49-F238E27FC236}">
-                <a16:creationId xmlns:a16="http://schemas.microsoft.com/office/drawing/2014/main" id="{A6187215-6C88-C1AB-5D6D-A87B51F7DD5A}"/>
+                <a16:creationId xmlns:a16="http://schemas.microsoft.com/office/drawing/2014/main" id="{238EB9DC-B805-5836-8CA8-084396ADCFD0}"/>
               </a:ext>
             </a:extLst>
           </p:cNvPr>
@@ -2178,7 +2178,7 @@
           <a:bodyPr/>
           <a:lstStyle/>
           <a:p>
-            <a:fld id="{4B1134DF-AF89-48C8-8AE6-E91660A6F6C0}" type="datetimeFigureOut">
+            <a:fld id="{A790249F-FB65-43FE-B7F4-EC47FBA5CFDF}" type="datetimeFigureOut">
               <a:rPr kumimoji="1" lang="ja-JP" altLang="en-US" smtClean="0"/>
               <a:t>2026/7/30</a:t>
             </a:fld>
@@ -2191,7 +2191,7 @@
           <p:cNvPr id="4" name="フッター プレースホルダー 3">
             <a:extLst>
               <a:ext uri="{FF2B5EF4-FFF2-40B4-BE49-F238E27FC236}">
-                <a16:creationId xmlns:a16="http://schemas.microsoft.com/office/drawing/2014/main" id="{260BA0F1-4D35-6E0D-71C1-148BE9CE8313}"/>
+                <a16:creationId xmlns:a16="http://schemas.microsoft.com/office/drawing/2014/main" id="{65F0CA39-14E5-6742-AFD7-BBEAAF2E5D54}"/>
               </a:ext>
             </a:extLst>
           </p:cNvPr>
@@ -2216,7 +2216,7 @@
           <p:cNvPr id="5" name="スライド番号プレースホルダー 4">
             <a:extLst>
               <a:ext uri="{FF2B5EF4-FFF2-40B4-BE49-F238E27FC236}">
-                <a16:creationId xmlns:a16="http://schemas.microsoft.com/office/drawing/2014/main" id="{8CE44032-0DED-6424-8DEA-D58FD5823F35}"/>
+                <a16:creationId xmlns:a16="http://schemas.microsoft.com/office/drawing/2014/main" id="{85AA1757-DAE6-917E-A7BA-7291E1A7E4BA}"/>
               </a:ext>
             </a:extLst>
           </p:cNvPr>
@@ -2232,7 +2232,7 @@
           <a:bodyPr/>
           <a:lstStyle/>
           <a:p>
-            <a:fld id="{B1D4365D-5AA6-4759-8C33-05B7AC82BACA}" type="slidenum">
+            <a:fld id="{58B0269A-8420-4C54-ADE6-B4C01A886CD9}" type="slidenum">
               <a:rPr kumimoji="1" lang="ja-JP" altLang="en-US" smtClean="0"/>
               <a:t>‹#›</a:t>
             </a:fld>
@@ -2243,7 +2243,7 @@
     </p:spTree>
     <p:extLst>
       <p:ext uri="{BB962C8B-B14F-4D97-AF65-F5344CB8AC3E}">
-        <p14:creationId xmlns:p14="http://schemas.microsoft.com/office/powerpoint/2010/main" val="3654406307"/>
+        <p14:creationId xmlns:p14="http://schemas.microsoft.com/office/powerpoint/2010/main" val="1832360897"/>
       </p:ext>
     </p:extLst>
   </p:cSld>
@@ -2275,7 +2275,7 @@
           <p:cNvPr id="2" name="日付プレースホルダー 1">
             <a:extLst>
               <a:ext uri="{FF2B5EF4-FFF2-40B4-BE49-F238E27FC236}">
-                <a16:creationId xmlns:a16="http://schemas.microsoft.com/office/drawing/2014/main" id="{7FE7E271-AAB9-8EB4-C7D6-C213A38B5629}"/>
+                <a16:creationId xmlns:a16="http://schemas.microsoft.com/office/drawing/2014/main" id="{FEC9D062-64AA-8915-E482-1EE03CE76562}"/>
               </a:ext>
             </a:extLst>
           </p:cNvPr>
@@ -2291,7 +2291,7 @@
           <a:bodyPr/>
           <a:lstStyle/>
           <a:p>
-            <a:fld id="{4B1134DF-AF89-48C8-8AE6-E91660A6F6C0}" type="datetimeFigureOut">
+            <a:fld id="{A790249F-FB65-43FE-B7F4-EC47FBA5CFDF}" type="datetimeFigureOut">
               <a:rPr kumimoji="1" lang="ja-JP" altLang="en-US" smtClean="0"/>
               <a:t>2026/7/30</a:t>
             </a:fld>
@@ -2304,7 +2304,7 @@
           <p:cNvPr id="3" name="フッター プレースホルダー 2">
             <a:extLst>
               <a:ext uri="{FF2B5EF4-FFF2-40B4-BE49-F238E27FC236}">
-                <a16:creationId xmlns:a16="http://schemas.microsoft.com/office/drawing/2014/main" id="{1BEB2FD1-8E8F-44D1-A4FC-A34CDCD004B3}"/>
+                <a16:creationId xmlns:a16="http://schemas.microsoft.com/office/drawing/2014/main" id="{D1454216-C851-3743-17D9-22B11FBE5C25}"/>
               </a:ext>
             </a:extLst>
           </p:cNvPr>
@@ -2329,7 +2329,7 @@
           <p:cNvPr id="4" name="スライド番号プレースホルダー 3">
             <a:extLst>
               <a:ext uri="{FF2B5EF4-FFF2-40B4-BE49-F238E27FC236}">
-                <a16:creationId xmlns:a16="http://schemas.microsoft.com/office/drawing/2014/main" id="{D913E454-C531-BABD-2995-F51A1921DBC6}"/>
+                <a16:creationId xmlns:a16="http://schemas.microsoft.com/office/drawing/2014/main" id="{17503CB7-2C6F-A609-70DD-5D296ACEE49C}"/>
               </a:ext>
             </a:extLst>
           </p:cNvPr>
@@ -2345,7 +2345,7 @@
           <a:bodyPr/>
           <a:lstStyle/>
           <a:p>
-            <a:fld id="{B1D4365D-5AA6-4759-8C33-05B7AC82BACA}" type="slidenum">
+            <a:fld id="{58B0269A-8420-4C54-ADE6-B4C01A886CD9}" type="slidenum">
               <a:rPr kumimoji="1" lang="ja-JP" altLang="en-US" smtClean="0"/>
               <a:t>‹#›</a:t>
             </a:fld>
@@ -2356,7 +2356,7 @@
     </p:spTree>
     <p:extLst>
       <p:ext uri="{BB962C8B-B14F-4D97-AF65-F5344CB8AC3E}">
-        <p14:creationId xmlns:p14="http://schemas.microsoft.com/office/powerpoint/2010/main" val="1557532821"/>
+        <p14:creationId xmlns:p14="http://schemas.microsoft.com/office/powerpoint/2010/main" val="59004680"/>
       </p:ext>
     </p:extLst>
   </p:cSld>
@@ -2388,7 +2388,7 @@
           <p:cNvPr id="2" name="タイトル 1">
             <a:extLst>
               <a:ext uri="{FF2B5EF4-FFF2-40B4-BE49-F238E27FC236}">
-                <a16:creationId xmlns:a16="http://schemas.microsoft.com/office/drawing/2014/main" id="{9577FBBF-C04C-5EB9-92FA-A8231DA8557E}"/>
+                <a16:creationId xmlns:a16="http://schemas.microsoft.com/office/drawing/2014/main" id="{6B31814C-788E-A3B3-9BED-7B11BE0E1CEB}"/>
               </a:ext>
             </a:extLst>
           </p:cNvPr>
@@ -2425,7 +2425,7 @@
           <p:cNvPr id="3" name="コンテンツ プレースホルダー 2">
             <a:extLst>
               <a:ext uri="{FF2B5EF4-FFF2-40B4-BE49-F238E27FC236}">
-                <a16:creationId xmlns:a16="http://schemas.microsoft.com/office/drawing/2014/main" id="{7FC4A6C9-AB12-9356-0973-60622D311AB7}"/>
+                <a16:creationId xmlns:a16="http://schemas.microsoft.com/office/drawing/2014/main" id="{2CD0D691-9B31-0C6D-F715-D52BEC9F3320}"/>
               </a:ext>
             </a:extLst>
           </p:cNvPr>
@@ -2547,7 +2547,7 @@
           <p:cNvPr id="4" name="テキスト プレースホルダー 3">
             <a:extLst>
               <a:ext uri="{FF2B5EF4-FFF2-40B4-BE49-F238E27FC236}">
-                <a16:creationId xmlns:a16="http://schemas.microsoft.com/office/drawing/2014/main" id="{971EB6E4-C0C9-3706-43B7-4EB5D88ACF36}"/>
+                <a16:creationId xmlns:a16="http://schemas.microsoft.com/office/drawing/2014/main" id="{4F84C4CB-30CF-1A34-8A9F-016D94EBB039}"/>
               </a:ext>
             </a:extLst>
           </p:cNvPr>
@@ -2618,7 +2618,7 @@
           <p:cNvPr id="5" name="日付プレースホルダー 4">
             <a:extLst>
               <a:ext uri="{FF2B5EF4-FFF2-40B4-BE49-F238E27FC236}">
-                <a16:creationId xmlns:a16="http://schemas.microsoft.com/office/drawing/2014/main" id="{EA0414EF-3651-55C3-B708-B28B5FEDCD0D}"/>
+                <a16:creationId xmlns:a16="http://schemas.microsoft.com/office/drawing/2014/main" id="{409C84DD-1825-E2CE-06FE-D80B6DBEF01A}"/>
               </a:ext>
             </a:extLst>
           </p:cNvPr>
@@ -2634,7 +2634,7 @@
           <a:bodyPr/>
           <a:lstStyle/>
           <a:p>
-            <a:fld id="{4B1134DF-AF89-48C8-8AE6-E91660A6F6C0}" type="datetimeFigureOut">
+            <a:fld id="{A790249F-FB65-43FE-B7F4-EC47FBA5CFDF}" type="datetimeFigureOut">
               <a:rPr kumimoji="1" lang="ja-JP" altLang="en-US" smtClean="0"/>
               <a:t>2026/7/30</a:t>
             </a:fld>
@@ -2647,7 +2647,7 @@
           <p:cNvPr id="6" name="フッター プレースホルダー 5">
             <a:extLst>
               <a:ext uri="{FF2B5EF4-FFF2-40B4-BE49-F238E27FC236}">
-                <a16:creationId xmlns:a16="http://schemas.microsoft.com/office/drawing/2014/main" id="{8886B574-D0D3-9735-0857-C8789E3AFD61}"/>
+                <a16:creationId xmlns:a16="http://schemas.microsoft.com/office/drawing/2014/main" id="{56502F33-C22E-0CF2-B96E-E93A3B57362D}"/>
               </a:ext>
             </a:extLst>
           </p:cNvPr>
@@ -2672,7 +2672,7 @@
           <p:cNvPr id="7" name="スライド番号プレースホルダー 6">
             <a:extLst>
               <a:ext uri="{FF2B5EF4-FFF2-40B4-BE49-F238E27FC236}">
-                <a16:creationId xmlns:a16="http://schemas.microsoft.com/office/drawing/2014/main" id="{04259468-3C62-CEFA-431D-7A2A502EBE6A}"/>
+                <a16:creationId xmlns:a16="http://schemas.microsoft.com/office/drawing/2014/main" id="{B35BDADE-37DA-DC4A-C57F-4F3F6244A51B}"/>
               </a:ext>
             </a:extLst>
           </p:cNvPr>
@@ -2688,7 +2688,7 @@
           <a:bodyPr/>
           <a:lstStyle/>
           <a:p>
-            <a:fld id="{B1D4365D-5AA6-4759-8C33-05B7AC82BACA}" type="slidenum">
+            <a:fld id="{58B0269A-8420-4C54-ADE6-B4C01A886CD9}" type="slidenum">
               <a:rPr kumimoji="1" lang="ja-JP" altLang="en-US" smtClean="0"/>
               <a:t>‹#›</a:t>
             </a:fld>
@@ -2699,7 +2699,7 @@
     </p:spTree>
     <p:extLst>
       <p:ext uri="{BB962C8B-B14F-4D97-AF65-F5344CB8AC3E}">
-        <p14:creationId xmlns:p14="http://schemas.microsoft.com/office/powerpoint/2010/main" val="3011042080"/>
+        <p14:creationId xmlns:p14="http://schemas.microsoft.com/office/powerpoint/2010/main" val="1258925143"/>
       </p:ext>
     </p:extLst>
   </p:cSld>
@@ -2731,7 +2731,7 @@
           <p:cNvPr id="2" name="タイトル 1">
             <a:extLst>
               <a:ext uri="{FF2B5EF4-FFF2-40B4-BE49-F238E27FC236}">
-                <a16:creationId xmlns:a16="http://schemas.microsoft.com/office/drawing/2014/main" id="{3D52E1E7-8B09-8743-EF0B-C69A16DD42FB}"/>
+                <a16:creationId xmlns:a16="http://schemas.microsoft.com/office/drawing/2014/main" id="{9A06C100-A448-323E-07CC-AA9D07716BBE}"/>
               </a:ext>
             </a:extLst>
           </p:cNvPr>
@@ -2768,7 +2768,7 @@
           <p:cNvPr id="3" name="図プレースホルダー 2">
             <a:extLst>
               <a:ext uri="{FF2B5EF4-FFF2-40B4-BE49-F238E27FC236}">
-                <a16:creationId xmlns:a16="http://schemas.microsoft.com/office/drawing/2014/main" id="{4617FE05-D8CD-09B3-2752-A806457C855B}"/>
+                <a16:creationId xmlns:a16="http://schemas.microsoft.com/office/drawing/2014/main" id="{B4575975-999D-1B51-03A6-1EC435288933}"/>
               </a:ext>
             </a:extLst>
           </p:cNvPr>
@@ -2835,7 +2835,7 @@
           <p:cNvPr id="4" name="テキスト プレースホルダー 3">
             <a:extLst>
               <a:ext uri="{FF2B5EF4-FFF2-40B4-BE49-F238E27FC236}">
-                <a16:creationId xmlns:a16="http://schemas.microsoft.com/office/drawing/2014/main" id="{1C2B51B5-BA4A-CAE3-8D6E-30D48DB9593D}"/>
+                <a16:creationId xmlns:a16="http://schemas.microsoft.com/office/drawing/2014/main" id="{F54E8F97-35BA-9FB4-B11C-DDD7653FC6B7}"/>
               </a:ext>
             </a:extLst>
           </p:cNvPr>
@@ -2906,7 +2906,7 @@
           <p:cNvPr id="5" name="日付プレースホルダー 4">
             <a:extLst>
               <a:ext uri="{FF2B5EF4-FFF2-40B4-BE49-F238E27FC236}">
-                <a16:creationId xmlns:a16="http://schemas.microsoft.com/office/drawing/2014/main" id="{A7C92A0F-9850-AD57-10A6-8D924A1FB2B4}"/>
+                <a16:creationId xmlns:a16="http://schemas.microsoft.com/office/drawing/2014/main" id="{78CF84A7-E651-25FD-B84E-E89D0EE4B264}"/>
               </a:ext>
             </a:extLst>
           </p:cNvPr>
@@ -2922,7 +2922,7 @@
           <a:bodyPr/>
           <a:lstStyle/>
           <a:p>
-            <a:fld id="{4B1134DF-AF89-48C8-8AE6-E91660A6F6C0}" type="datetimeFigureOut">
+            <a:fld id="{A790249F-FB65-43FE-B7F4-EC47FBA5CFDF}" type="datetimeFigureOut">
               <a:rPr kumimoji="1" lang="ja-JP" altLang="en-US" smtClean="0"/>
               <a:t>2026/7/30</a:t>
             </a:fld>
@@ -2935,7 +2935,7 @@
           <p:cNvPr id="6" name="フッター プレースホルダー 5">
             <a:extLst>
               <a:ext uri="{FF2B5EF4-FFF2-40B4-BE49-F238E27FC236}">
-                <a16:creationId xmlns:a16="http://schemas.microsoft.com/office/drawing/2014/main" id="{D11F13D7-51A5-7AAC-E721-A7993B2FDE59}"/>
+                <a16:creationId xmlns:a16="http://schemas.microsoft.com/office/drawing/2014/main" id="{1AE5E192-ADF5-1508-7876-716CB81F3168}"/>
               </a:ext>
             </a:extLst>
           </p:cNvPr>
@@ -2960,7 +2960,7 @@
           <p:cNvPr id="7" name="スライド番号プレースホルダー 6">
             <a:extLst>
               <a:ext uri="{FF2B5EF4-FFF2-40B4-BE49-F238E27FC236}">
-                <a16:creationId xmlns:a16="http://schemas.microsoft.com/office/drawing/2014/main" id="{E9E3B48C-8F0D-B8E2-B54E-3F2E3AF6C719}"/>
+                <a16:creationId xmlns:a16="http://schemas.microsoft.com/office/drawing/2014/main" id="{35E3A409-5924-C774-DEDD-23039747E41C}"/>
               </a:ext>
             </a:extLst>
           </p:cNvPr>
@@ -2976,7 +2976,7 @@
           <a:bodyPr/>
           <a:lstStyle/>
           <a:p>
-            <a:fld id="{B1D4365D-5AA6-4759-8C33-05B7AC82BACA}" type="slidenum">
+            <a:fld id="{58B0269A-8420-4C54-ADE6-B4C01A886CD9}" type="slidenum">
               <a:rPr kumimoji="1" lang="ja-JP" altLang="en-US" smtClean="0"/>
               <a:t>‹#›</a:t>
             </a:fld>
@@ -2987,7 +2987,7 @@
     </p:spTree>
     <p:extLst>
       <p:ext uri="{BB962C8B-B14F-4D97-AF65-F5344CB8AC3E}">
-        <p14:creationId xmlns:p14="http://schemas.microsoft.com/office/powerpoint/2010/main" val="2750686990"/>
+        <p14:creationId xmlns:p14="http://schemas.microsoft.com/office/powerpoint/2010/main" val="1124543001"/>
       </p:ext>
     </p:extLst>
   </p:cSld>
@@ -3024,7 +3024,7 @@
           <p:cNvPr id="2" name="タイトル プレースホルダー 1">
             <a:extLst>
               <a:ext uri="{FF2B5EF4-FFF2-40B4-BE49-F238E27FC236}">
-                <a16:creationId xmlns:a16="http://schemas.microsoft.com/office/drawing/2014/main" id="{24642320-1AE3-6A30-1CF8-9E5A4118E69B}"/>
+                <a16:creationId xmlns:a16="http://schemas.microsoft.com/office/drawing/2014/main" id="{AF1E53AA-4E34-B613-4816-7BFD0D9C3614}"/>
               </a:ext>
             </a:extLst>
           </p:cNvPr>
@@ -3062,7 +3062,7 @@
           <p:cNvPr id="3" name="テキスト プレースホルダー 2">
             <a:extLst>
               <a:ext uri="{FF2B5EF4-FFF2-40B4-BE49-F238E27FC236}">
-                <a16:creationId xmlns:a16="http://schemas.microsoft.com/office/drawing/2014/main" id="{C20DEFCE-B978-D754-4119-1529DF6F6D76}"/>
+                <a16:creationId xmlns:a16="http://schemas.microsoft.com/office/drawing/2014/main" id="{6F451DEB-CEA9-E20B-B661-8AB72C23F3C2}"/>
               </a:ext>
             </a:extLst>
           </p:cNvPr>
@@ -3161,7 +3161,7 @@
           <p:cNvPr id="4" name="日付プレースホルダー 3">
             <a:extLst>
               <a:ext uri="{FF2B5EF4-FFF2-40B4-BE49-F238E27FC236}">
-                <a16:creationId xmlns:a16="http://schemas.microsoft.com/office/drawing/2014/main" id="{3677B1BD-A993-F473-C76C-A23AFA891489}"/>
+                <a16:creationId xmlns:a16="http://schemas.microsoft.com/office/drawing/2014/main" id="{F5F9406E-EE21-E761-617D-458008E7BD0E}"/>
               </a:ext>
             </a:extLst>
           </p:cNvPr>
@@ -3195,7 +3195,7 @@
             </a:lvl1pPr>
           </a:lstStyle>
           <a:p>
-            <a:fld id="{4B1134DF-AF89-48C8-8AE6-E91660A6F6C0}" type="datetimeFigureOut">
+            <a:fld id="{A790249F-FB65-43FE-B7F4-EC47FBA5CFDF}" type="datetimeFigureOut">
               <a:rPr kumimoji="1" lang="ja-JP" altLang="en-US" smtClean="0"/>
               <a:t>2026/7/30</a:t>
             </a:fld>
@@ -3208,7 +3208,7 @@
           <p:cNvPr id="5" name="フッター プレースホルダー 4">
             <a:extLst>
               <a:ext uri="{FF2B5EF4-FFF2-40B4-BE49-F238E27FC236}">
-                <a16:creationId xmlns:a16="http://schemas.microsoft.com/office/drawing/2014/main" id="{F7C0DAFD-8E92-FA93-040D-833C2F42D638}"/>
+                <a16:creationId xmlns:a16="http://schemas.microsoft.com/office/drawing/2014/main" id="{2BD649C6-CA10-C7DC-3570-E5E3C5888B8B}"/>
               </a:ext>
             </a:extLst>
           </p:cNvPr>
@@ -3251,7 +3251,7 @@
           <p:cNvPr id="6" name="スライド番号プレースホルダー 5">
             <a:extLst>
               <a:ext uri="{FF2B5EF4-FFF2-40B4-BE49-F238E27FC236}">
-                <a16:creationId xmlns:a16="http://schemas.microsoft.com/office/drawing/2014/main" id="{F869DB8B-B3C2-4698-33C1-E47753B45CC5}"/>
+                <a16:creationId xmlns:a16="http://schemas.microsoft.com/office/drawing/2014/main" id="{BDD2824F-B97B-55BB-09C0-F1AA477891F6}"/>
               </a:ext>
             </a:extLst>
           </p:cNvPr>
@@ -3285,7 +3285,7 @@
             </a:lvl1pPr>
           </a:lstStyle>
           <a:p>
-            <a:fld id="{B1D4365D-5AA6-4759-8C33-05B7AC82BACA}" type="slidenum">
+            <a:fld id="{58B0269A-8420-4C54-ADE6-B4C01A886CD9}" type="slidenum">
               <a:rPr kumimoji="1" lang="ja-JP" altLang="en-US" smtClean="0"/>
               <a:t>‹#›</a:t>
             </a:fld>
@@ -3296,7 +3296,7 @@
     </p:spTree>
     <p:extLst>
       <p:ext uri="{BB962C8B-B14F-4D97-AF65-F5344CB8AC3E}">
-        <p14:creationId xmlns:p14="http://schemas.microsoft.com/office/powerpoint/2010/main" val="48233945"/>
+        <p14:creationId xmlns:p14="http://schemas.microsoft.com/office/powerpoint/2010/main" val="2422101004"/>
       </p:ext>
     </p:extLst>
   </p:cSld>
@@ -3619,7 +3619,7 @@
           <p:cNvPr id="2" name="テキスト ボックス 1">
             <a:extLst>
               <a:ext uri="{FF2B5EF4-FFF2-40B4-BE49-F238E27FC236}">
-                <a16:creationId xmlns:a16="http://schemas.microsoft.com/office/drawing/2014/main" id="{88FE6943-5DD7-55E1-008E-612C27286F3E}"/>
+                <a16:creationId xmlns:a16="http://schemas.microsoft.com/office/drawing/2014/main" id="{D1D12DF8-8508-FBB6-5ADF-1236DB959B7F}"/>
               </a:ext>
             </a:extLst>
           </p:cNvPr>
@@ -3665,7 +3665,7 @@
           <p:cNvPr id="3" name="テキスト ボックス 2">
             <a:extLst>
               <a:ext uri="{FF2B5EF4-FFF2-40B4-BE49-F238E27FC236}">
-                <a16:creationId xmlns:a16="http://schemas.microsoft.com/office/drawing/2014/main" id="{B79309DC-4886-0D4F-9399-A0E33B6A66A8}"/>
+                <a16:creationId xmlns:a16="http://schemas.microsoft.com/office/drawing/2014/main" id="{78E79C88-A769-91F7-6E98-8B57D6BE3684}"/>
               </a:ext>
             </a:extLst>
           </p:cNvPr>
@@ -3695,14 +3695,17 @@
                 </a:solidFill>
                 <a:latin typeface="Arial" panose="020B0604020202020204" pitchFamily="34" charset="0"/>
               </a:rPr>
-              <a:t>retro-new-games-api TECH EXPLANATION</a:t>
-            </a:r>
-            <a:endParaRPr kumimoji="1" lang="ja-JP" altLang="en-US" sz="3400" b="1">
-              <a:solidFill>
-                <a:srgbClr val="111111"/>
-              </a:solidFill>
-              <a:latin typeface="Arial" panose="020B0604020202020204" pitchFamily="34" charset="0"/>
-            </a:endParaRPr>
+              <a:t>Retro New Games Api</a:t>
+            </a:r>
+            <a:r>
+              <a:rPr kumimoji="1" lang="ja-JP" altLang="en-US" sz="3400" b="1">
+                <a:solidFill>
+                  <a:srgbClr val="111111"/>
+                </a:solidFill>
+                <a:latin typeface="Arial" panose="020B0604020202020204" pitchFamily="34" charset="0"/>
+              </a:rPr>
+              <a:t>の技術解説</a:t>
+            </a:r>
           </a:p>
         </p:txBody>
       </p:sp>
@@ -3711,7 +3714,7 @@
           <p:cNvPr id="4" name="テキスト ボックス 3">
             <a:extLst>
               <a:ext uri="{FF2B5EF4-FFF2-40B4-BE49-F238E27FC236}">
-                <a16:creationId xmlns:a16="http://schemas.microsoft.com/office/drawing/2014/main" id="{F57D669B-33CC-6F4B-9483-A60DE9778A9D}"/>
+                <a16:creationId xmlns:a16="http://schemas.microsoft.com/office/drawing/2014/main" id="{2C90FDA9-2B3F-65DA-AE4D-EB95570F6837}"/>
               </a:ext>
             </a:extLst>
           </p:cNvPr>
@@ -3735,20 +3738,14 @@
           <a:lstStyle/>
           <a:p>
             <a:r>
-              <a:rPr kumimoji="1" lang="en-US" altLang="ja-JP" sz="2000">
+              <a:rPr kumimoji="1" lang="ja-JP" altLang="en-US" sz="2000">
                 <a:solidFill>
                   <a:srgbClr val="333333"/>
                 </a:solidFill>
                 <a:latin typeface="Arial" panose="020B0604020202020204" pitchFamily="34" charset="0"/>
               </a:rPr>
-              <a:t>Architecture, implementation and commit history in 75 seconds</a:t>
-            </a:r>
-            <a:endParaRPr kumimoji="1" lang="ja-JP" altLang="en-US" sz="2000">
-              <a:solidFill>
-                <a:srgbClr val="333333"/>
-              </a:solidFill>
-              <a:latin typeface="Arial" panose="020B0604020202020204" pitchFamily="34" charset="0"/>
-            </a:endParaRPr>
+              <a:t>設計・実装・コミットから学ぶ短時間プレビュー</a:t>
+            </a:r>
           </a:p>
         </p:txBody>
       </p:sp>
@@ -3757,7 +3754,7 @@
           <p:cNvPr id="5" name="テキスト ボックス 4">
             <a:extLst>
               <a:ext uri="{FF2B5EF4-FFF2-40B4-BE49-F238E27FC236}">
-                <a16:creationId xmlns:a16="http://schemas.microsoft.com/office/drawing/2014/main" id="{05F4E8F3-E24E-04FC-B2C9-A8D4ACA8D432}"/>
+                <a16:creationId xmlns:a16="http://schemas.microsoft.com/office/drawing/2014/main" id="{7A73C0F6-472E-2CF9-445E-5AD1EA639137}"/>
               </a:ext>
             </a:extLst>
           </p:cNvPr>
@@ -3804,7 +3801,7 @@
             <a:hlinkClick r:id="" action="ppaction://media"/>
             <a:extLst>
               <a:ext uri="{FF2B5EF4-FFF2-40B4-BE49-F238E27FC236}">
-                <a16:creationId xmlns:a16="http://schemas.microsoft.com/office/drawing/2014/main" id="{956363A2-D9FE-8E04-D780-A7AD83F069CD}"/>
+                <a16:creationId xmlns:a16="http://schemas.microsoft.com/office/drawing/2014/main" id="{96DDC65F-5B73-BDBE-62DF-CAD7DA439874}"/>
               </a:ext>
             </a:extLst>
           </p:cNvPr>
@@ -3839,7 +3836,7 @@
     </p:spTree>
     <p:extLst>
       <p:ext uri="{BB962C8B-B14F-4D97-AF65-F5344CB8AC3E}">
-        <p14:creationId xmlns:p14="http://schemas.microsoft.com/office/powerpoint/2010/main" val="1011947628"/>
+        <p14:creationId xmlns:p14="http://schemas.microsoft.com/office/powerpoint/2010/main" val="1787773816"/>
       </p:ext>
     </p:extLst>
   </p:cSld>
@@ -3963,7 +3960,7 @@
           <p:cNvPr id="2" name="テキスト ボックス 1">
             <a:extLst>
               <a:ext uri="{FF2B5EF4-FFF2-40B4-BE49-F238E27FC236}">
-                <a16:creationId xmlns:a16="http://schemas.microsoft.com/office/drawing/2014/main" id="{79F41F6E-3590-A249-9FFE-557695DE0B52}"/>
+                <a16:creationId xmlns:a16="http://schemas.microsoft.com/office/drawing/2014/main" id="{DEBCB6E8-AC41-B229-DD59-29D3C4BB50CA}"/>
               </a:ext>
             </a:extLst>
           </p:cNvPr>
@@ -4009,7 +4006,7 @@
           <p:cNvPr id="3" name="テキスト ボックス 2">
             <a:extLst>
               <a:ext uri="{FF2B5EF4-FFF2-40B4-BE49-F238E27FC236}">
-                <a16:creationId xmlns:a16="http://schemas.microsoft.com/office/drawing/2014/main" id="{B4524483-D195-B857-6142-A8CFEEF2DC36}"/>
+                <a16:creationId xmlns:a16="http://schemas.microsoft.com/office/drawing/2014/main" id="{7E05658C-18BD-A80E-5D3D-331F7B00317B}"/>
               </a:ext>
             </a:extLst>
           </p:cNvPr>
@@ -4033,20 +4030,14 @@
           <a:lstStyle/>
           <a:p>
             <a:r>
-              <a:rPr kumimoji="1" lang="en-US" altLang="ja-JP" sz="3400" b="1">
+              <a:rPr kumimoji="1" lang="ja-JP" altLang="en-US" sz="3400" b="1">
                 <a:solidFill>
                   <a:srgbClr val="111111"/>
                 </a:solidFill>
                 <a:latin typeface="Arial" panose="020B0604020202020204" pitchFamily="34" charset="0"/>
               </a:rPr>
-              <a:t>WHAT DOES IT SOLVE?</a:t>
-            </a:r>
-            <a:endParaRPr kumimoji="1" lang="ja-JP" altLang="en-US" sz="3400" b="1">
-              <a:solidFill>
-                <a:srgbClr val="111111"/>
-              </a:solidFill>
-              <a:latin typeface="Arial" panose="020B0604020202020204" pitchFamily="34" charset="0"/>
-            </a:endParaRPr>
+              <a:t>このプロジェクトは何を解決する？</a:t>
+            </a:r>
           </a:p>
         </p:txBody>
       </p:sp>
@@ -4055,7 +4046,7 @@
           <p:cNvPr id="4" name="テキスト ボックス 3">
             <a:extLst>
               <a:ext uri="{FF2B5EF4-FFF2-40B4-BE49-F238E27FC236}">
-                <a16:creationId xmlns:a16="http://schemas.microsoft.com/office/drawing/2014/main" id="{E64779FD-38CD-1DB7-19D2-F952AF4331B2}"/>
+                <a16:creationId xmlns:a16="http://schemas.microsoft.com/office/drawing/2014/main" id="{4269CD49-16F8-2F1B-DDCB-30C6F67AD3C7}"/>
               </a:ext>
             </a:extLst>
           </p:cNvPr>
@@ -4158,7 +4149,7 @@
           <p:cNvPr id="5" name="テキスト ボックス 4">
             <a:extLst>
               <a:ext uri="{FF2B5EF4-FFF2-40B4-BE49-F238E27FC236}">
-                <a16:creationId xmlns:a16="http://schemas.microsoft.com/office/drawing/2014/main" id="{11761BA0-4E45-3F1A-5D5E-F3C42FD2145B}"/>
+                <a16:creationId xmlns:a16="http://schemas.microsoft.com/office/drawing/2014/main" id="{2B5B9A39-500D-312C-AFE0-3BA2F33664B7}"/>
               </a:ext>
             </a:extLst>
           </p:cNvPr>
@@ -4205,7 +4196,7 @@
             <a:hlinkClick r:id="" action="ppaction://media"/>
             <a:extLst>
               <a:ext uri="{FF2B5EF4-FFF2-40B4-BE49-F238E27FC236}">
-                <a16:creationId xmlns:a16="http://schemas.microsoft.com/office/drawing/2014/main" id="{EF363C8B-770C-D837-B245-CA836C5EFE6D}"/>
+                <a16:creationId xmlns:a16="http://schemas.microsoft.com/office/drawing/2014/main" id="{6417F396-6B93-F3F1-2AA3-F0A0911F9B33}"/>
               </a:ext>
             </a:extLst>
           </p:cNvPr>
@@ -4240,7 +4231,7 @@
     </p:spTree>
     <p:extLst>
       <p:ext uri="{BB962C8B-B14F-4D97-AF65-F5344CB8AC3E}">
-        <p14:creationId xmlns:p14="http://schemas.microsoft.com/office/powerpoint/2010/main" val="2218903400"/>
+        <p14:creationId xmlns:p14="http://schemas.microsoft.com/office/powerpoint/2010/main" val="1504339631"/>
       </p:ext>
     </p:extLst>
   </p:cSld>
@@ -4364,7 +4355,7 @@
           <p:cNvPr id="2" name="テキスト ボックス 1">
             <a:extLst>
               <a:ext uri="{FF2B5EF4-FFF2-40B4-BE49-F238E27FC236}">
-                <a16:creationId xmlns:a16="http://schemas.microsoft.com/office/drawing/2014/main" id="{B4C55729-7F47-B62A-629E-36EE0F18C796}"/>
+                <a16:creationId xmlns:a16="http://schemas.microsoft.com/office/drawing/2014/main" id="{8301A1B7-E188-B2D5-B7C0-27CA60A3687A}"/>
               </a:ext>
             </a:extLst>
           </p:cNvPr>
@@ -4410,7 +4401,7 @@
           <p:cNvPr id="3" name="テキスト ボックス 2">
             <a:extLst>
               <a:ext uri="{FF2B5EF4-FFF2-40B4-BE49-F238E27FC236}">
-                <a16:creationId xmlns:a16="http://schemas.microsoft.com/office/drawing/2014/main" id="{4689A60C-ACA9-BBDF-98B3-1351A232E94F}"/>
+                <a16:creationId xmlns:a16="http://schemas.microsoft.com/office/drawing/2014/main" id="{991AE693-1C7C-0AC5-2A7F-C29B0CD370C0}"/>
               </a:ext>
             </a:extLst>
           </p:cNvPr>
@@ -4434,20 +4425,14 @@
           <a:lstStyle/>
           <a:p>
             <a:r>
-              <a:rPr kumimoji="1" lang="en-US" altLang="ja-JP" sz="3400" b="1">
+              <a:rPr kumimoji="1" lang="ja-JP" altLang="en-US" sz="3400" b="1">
                 <a:solidFill>
                   <a:srgbClr val="111111"/>
                 </a:solidFill>
                 <a:latin typeface="Arial" panose="020B0604020202020204" pitchFamily="34" charset="0"/>
               </a:rPr>
-              <a:t>TECH STACK</a:t>
-            </a:r>
-            <a:endParaRPr kumimoji="1" lang="ja-JP" altLang="en-US" sz="3400" b="1">
-              <a:solidFill>
-                <a:srgbClr val="111111"/>
-              </a:solidFill>
-              <a:latin typeface="Arial" panose="020B0604020202020204" pitchFamily="34" charset="0"/>
-            </a:endParaRPr>
+              <a:t>技術スタック</a:t>
+            </a:r>
           </a:p>
         </p:txBody>
       </p:sp>
@@ -4456,7 +4441,7 @@
           <p:cNvPr id="4" name="テキスト ボックス 3">
             <a:extLst>
               <a:ext uri="{FF2B5EF4-FFF2-40B4-BE49-F238E27FC236}">
-                <a16:creationId xmlns:a16="http://schemas.microsoft.com/office/drawing/2014/main" id="{FF907EC8-57B3-B64E-C941-2D894FF899C4}"/>
+                <a16:creationId xmlns:a16="http://schemas.microsoft.com/office/drawing/2014/main" id="{49923033-FE6B-C742-6C2C-5B800876EF45}"/>
               </a:ext>
             </a:extLst>
           </p:cNvPr>
@@ -4466,7 +4451,7 @@
         <p:spPr>
           <a:xfrm>
             <a:off x="533400" y="3429000"/>
-            <a:ext cx="10795000" cy="400110"/>
+            <a:ext cx="10795000" cy="707886"/>
           </a:xfrm>
           <a:prstGeom prst="rect">
             <a:avLst/>
@@ -4480,20 +4465,33 @@
           <a:lstStyle/>
           <a:p>
             <a:r>
+              <a:rPr kumimoji="1" lang="ja-JP" altLang="en-US" sz="2000">
+                <a:solidFill>
+                  <a:srgbClr val="333333"/>
+                </a:solidFill>
+                <a:latin typeface="Arial" panose="020B0604020202020204" pitchFamily="34" charset="0"/>
+              </a:rPr>
+              <a:t>主要技術：</a:t>
+            </a:r>
+            <a:r>
               <a:rPr kumimoji="1" lang="en-US" altLang="ja-JP" sz="2000">
                 <a:solidFill>
                   <a:srgbClr val="333333"/>
                 </a:solidFill>
                 <a:latin typeface="Arial" panose="020B0604020202020204" pitchFamily="34" charset="0"/>
               </a:rPr>
-              <a:t>Primary technologies: TypeScript</a:t>
-            </a:r>
-            <a:endParaRPr kumimoji="1" lang="ja-JP" altLang="en-US" sz="2000">
-              <a:solidFill>
-                <a:srgbClr val="333333"/>
-              </a:solidFill>
-              <a:latin typeface="Arial" panose="020B0604020202020204" pitchFamily="34" charset="0"/>
-            </a:endParaRPr>
+              <a:t>TypeScript
+</a:t>
+            </a:r>
+            <a:r>
+              <a:rPr kumimoji="1" lang="ja-JP" altLang="en-US" sz="2000">
+                <a:solidFill>
+                  <a:srgbClr val="333333"/>
+                </a:solidFill>
+                <a:latin typeface="Arial" panose="020B0604020202020204" pitchFamily="34" charset="0"/>
+              </a:rPr>
+              <a:t>役割を分け、保守しやすい構成を目指しています。</a:t>
+            </a:r>
           </a:p>
         </p:txBody>
       </p:sp>
@@ -4502,7 +4500,7 @@
           <p:cNvPr id="5" name="テキスト ボックス 4">
             <a:extLst>
               <a:ext uri="{FF2B5EF4-FFF2-40B4-BE49-F238E27FC236}">
-                <a16:creationId xmlns:a16="http://schemas.microsoft.com/office/drawing/2014/main" id="{92A78ADE-9AA7-397B-2583-EA7E07B21A49}"/>
+                <a16:creationId xmlns:a16="http://schemas.microsoft.com/office/drawing/2014/main" id="{55FF107D-6A0D-C372-9484-1A27B77ED6C1}"/>
               </a:ext>
             </a:extLst>
           </p:cNvPr>
@@ -4549,7 +4547,7 @@
             <a:hlinkClick r:id="" action="ppaction://media"/>
             <a:extLst>
               <a:ext uri="{FF2B5EF4-FFF2-40B4-BE49-F238E27FC236}">
-                <a16:creationId xmlns:a16="http://schemas.microsoft.com/office/drawing/2014/main" id="{E48965BB-D262-6817-389C-D78B3DE759C9}"/>
+                <a16:creationId xmlns:a16="http://schemas.microsoft.com/office/drawing/2014/main" id="{11402A1B-6E47-37A7-63B4-8CD8F6791F73}"/>
               </a:ext>
             </a:extLst>
           </p:cNvPr>
@@ -4584,7 +4582,7 @@
     </p:spTree>
     <p:extLst>
       <p:ext uri="{BB962C8B-B14F-4D97-AF65-F5344CB8AC3E}">
-        <p14:creationId xmlns:p14="http://schemas.microsoft.com/office/powerpoint/2010/main" val="4550332"/>
+        <p14:creationId xmlns:p14="http://schemas.microsoft.com/office/powerpoint/2010/main" val="2453627094"/>
       </p:ext>
     </p:extLst>
   </p:cSld>
@@ -4708,7 +4706,7 @@
           <p:cNvPr id="2" name="テキスト ボックス 1">
             <a:extLst>
               <a:ext uri="{FF2B5EF4-FFF2-40B4-BE49-F238E27FC236}">
-                <a16:creationId xmlns:a16="http://schemas.microsoft.com/office/drawing/2014/main" id="{3E92D6FC-7D6D-D3E3-AD8A-DD6D64DEC8B1}"/>
+                <a16:creationId xmlns:a16="http://schemas.microsoft.com/office/drawing/2014/main" id="{06D0494F-F0D2-07FD-9BF9-02B1022C77C6}"/>
               </a:ext>
             </a:extLst>
           </p:cNvPr>
@@ -4754,7 +4752,7 @@
           <p:cNvPr id="3" name="テキスト ボックス 2">
             <a:extLst>
               <a:ext uri="{FF2B5EF4-FFF2-40B4-BE49-F238E27FC236}">
-                <a16:creationId xmlns:a16="http://schemas.microsoft.com/office/drawing/2014/main" id="{678A155E-FCB1-88D9-A6EF-0EF13A1BAC50}"/>
+                <a16:creationId xmlns:a16="http://schemas.microsoft.com/office/drawing/2014/main" id="{1C4969E7-EAE1-E374-B3BD-ED08A24C0C22}"/>
               </a:ext>
             </a:extLst>
           </p:cNvPr>
@@ -4778,20 +4776,14 @@
           <a:lstStyle/>
           <a:p>
             <a:r>
-              <a:rPr kumimoji="1" lang="en-US" altLang="ja-JP" sz="3400" b="1">
+              <a:rPr kumimoji="1" lang="ja-JP" altLang="en-US" sz="3400" b="1">
                 <a:solidFill>
                   <a:srgbClr val="111111"/>
                 </a:solidFill>
                 <a:latin typeface="Arial" panose="020B0604020202020204" pitchFamily="34" charset="0"/>
               </a:rPr>
-              <a:t>REPOSITORY HIGHLIGHTS</a:t>
-            </a:r>
-            <a:endParaRPr kumimoji="1" lang="ja-JP" altLang="en-US" sz="3400" b="1">
-              <a:solidFill>
-                <a:srgbClr val="111111"/>
-              </a:solidFill>
-              <a:latin typeface="Arial" panose="020B0604020202020204" pitchFamily="34" charset="0"/>
-            </a:endParaRPr>
+              <a:t>リポジトリの読みどころ</a:t>
+            </a:r>
           </a:p>
         </p:txBody>
       </p:sp>
@@ -4800,7 +4792,7 @@
           <p:cNvPr id="4" name="テキスト ボックス 3">
             <a:extLst>
               <a:ext uri="{FF2B5EF4-FFF2-40B4-BE49-F238E27FC236}">
-                <a16:creationId xmlns:a16="http://schemas.microsoft.com/office/drawing/2014/main" id="{7FF088EA-4F8E-E2F3-014B-2407662FA174}"/>
+                <a16:creationId xmlns:a16="http://schemas.microsoft.com/office/drawing/2014/main" id="{9C059FE7-3DDE-F8EA-1305-7BD4CFC20066}"/>
               </a:ext>
             </a:extLst>
           </p:cNvPr>
@@ -4810,7 +4802,7 @@
         <p:spPr>
           <a:xfrm>
             <a:off x="533400" y="3429000"/>
-            <a:ext cx="10795000" cy="400110"/>
+            <a:ext cx="10795000" cy="707886"/>
           </a:xfrm>
           <a:prstGeom prst="rect">
             <a:avLst/>
@@ -4824,13 +4816,77 @@
           <a:lstStyle/>
           <a:p>
             <a:r>
+              <a:rPr kumimoji="1" lang="ja-JP" altLang="en-US" sz="2000">
+                <a:solidFill>
+                  <a:srgbClr val="333333"/>
+                </a:solidFill>
+                <a:latin typeface="Arial" panose="020B0604020202020204" pitchFamily="34" charset="0"/>
+              </a:rPr>
+              <a:t>公開コード、</a:t>
+            </a:r>
+            <a:r>
               <a:rPr kumimoji="1" lang="en-US" altLang="ja-JP" sz="2000">
                 <a:solidFill>
                   <a:srgbClr val="333333"/>
                 </a:solidFill>
                 <a:latin typeface="Arial" panose="020B0604020202020204" pitchFamily="34" charset="0"/>
               </a:rPr>
-              <a:t>Public source code, README and commit history reveal the design decisions.</a:t>
+              <a:t>README</a:t>
+            </a:r>
+            <a:r>
+              <a:rPr kumimoji="1" lang="ja-JP" altLang="en-US" sz="2000">
+                <a:solidFill>
+                  <a:srgbClr val="333333"/>
+                </a:solidFill>
+                <a:latin typeface="Arial" panose="020B0604020202020204" pitchFamily="34" charset="0"/>
+              </a:rPr>
+              <a:t>、コミット履歴から設計判断を確認できます。
+主なファイル：</a:t>
+            </a:r>
+            <a:r>
+              <a:rPr kumimoji="1" lang="en-US" altLang="ja-JP" sz="2000">
+                <a:solidFill>
+                  <a:srgbClr val="333333"/>
+                </a:solidFill>
+                <a:latin typeface="Arial" panose="020B0604020202020204" pitchFamily="34" charset="0"/>
+              </a:rPr>
+              <a:t>README.md</a:t>
+            </a:r>
+            <a:r>
+              <a:rPr kumimoji="1" lang="ja-JP" altLang="en-US" sz="2000">
+                <a:solidFill>
+                  <a:srgbClr val="333333"/>
+                </a:solidFill>
+                <a:latin typeface="Arial" panose="020B0604020202020204" pitchFamily="34" charset="0"/>
+              </a:rPr>
+              <a:t>、</a:t>
+            </a:r>
+            <a:r>
+              <a:rPr kumimoji="1" lang="en-US" altLang="ja-JP" sz="2000">
+                <a:solidFill>
+                  <a:srgbClr val="333333"/>
+                </a:solidFill>
+                <a:latin typeface="Arial" panose="020B0604020202020204" pitchFamily="34" charset="0"/>
+              </a:rPr>
+              <a:t>migrations</a:t>
+            </a:r>
+            <a:r>
+              <a:rPr kumimoji="1" lang="ja-JP" altLang="en-US" sz="2000">
+                <a:solidFill>
+                  <a:srgbClr val="333333"/>
+                </a:solidFill>
+                <a:latin typeface="Arial" panose="020B0604020202020204" pitchFamily="34" charset="0"/>
+              </a:rPr>
+              <a:t>、</a:t>
+            </a:r>
+            <a:r>
+              <a:rPr kumimoji="1" lang="en-US" altLang="ja-JP" sz="2000">
+                <a:solidFill>
+                  <a:srgbClr val="333333"/>
+                </a:solidFill>
+                <a:latin typeface="Arial" panose="020B0604020202020204" pitchFamily="34" charset="0"/>
+              </a:rPr>
+              <a:t>package-lock.json</a:t>
             </a:r>
             <a:endParaRPr kumimoji="1" lang="ja-JP" altLang="en-US" sz="2000">
               <a:solidFill>
@@ -4846,7 +4902,7 @@
           <p:cNvPr id="5" name="テキスト ボックス 4">
             <a:extLst>
               <a:ext uri="{FF2B5EF4-FFF2-40B4-BE49-F238E27FC236}">
-                <a16:creationId xmlns:a16="http://schemas.microsoft.com/office/drawing/2014/main" id="{F7A7C56F-6A47-FCC0-8099-10EDB8D360E2}"/>
+                <a16:creationId xmlns:a16="http://schemas.microsoft.com/office/drawing/2014/main" id="{9ACD9802-3EC4-AA3C-AFFA-2A7CB6DE827C}"/>
               </a:ext>
             </a:extLst>
           </p:cNvPr>
@@ -4893,7 +4949,7 @@
             <a:hlinkClick r:id="" action="ppaction://media"/>
             <a:extLst>
               <a:ext uri="{FF2B5EF4-FFF2-40B4-BE49-F238E27FC236}">
-                <a16:creationId xmlns:a16="http://schemas.microsoft.com/office/drawing/2014/main" id="{2720EF94-288A-65BE-273D-BCA2F2BFFB20}"/>
+                <a16:creationId xmlns:a16="http://schemas.microsoft.com/office/drawing/2014/main" id="{249F03F4-4904-656B-5BDE-4571F5A6A6DE}"/>
               </a:ext>
             </a:extLst>
           </p:cNvPr>
@@ -4928,7 +4984,7 @@
     </p:spTree>
     <p:extLst>
       <p:ext uri="{BB962C8B-B14F-4D97-AF65-F5344CB8AC3E}">
-        <p14:creationId xmlns:p14="http://schemas.microsoft.com/office/powerpoint/2010/main" val="2572924724"/>
+        <p14:creationId xmlns:p14="http://schemas.microsoft.com/office/powerpoint/2010/main" val="3973400995"/>
       </p:ext>
     </p:extLst>
   </p:cSld>
@@ -5052,7 +5108,7 @@
           <p:cNvPr id="2" name="テキスト ボックス 1">
             <a:extLst>
               <a:ext uri="{FF2B5EF4-FFF2-40B4-BE49-F238E27FC236}">
-                <a16:creationId xmlns:a16="http://schemas.microsoft.com/office/drawing/2014/main" id="{F93B5AA0-933C-74EB-ED8F-B14BEFCAAC1C}"/>
+                <a16:creationId xmlns:a16="http://schemas.microsoft.com/office/drawing/2014/main" id="{9219F744-4753-948A-0026-351EF5610A92}"/>
               </a:ext>
             </a:extLst>
           </p:cNvPr>
@@ -5098,7 +5154,7 @@
           <p:cNvPr id="3" name="テキスト ボックス 2">
             <a:extLst>
               <a:ext uri="{FF2B5EF4-FFF2-40B4-BE49-F238E27FC236}">
-                <a16:creationId xmlns:a16="http://schemas.microsoft.com/office/drawing/2014/main" id="{656265FF-CC83-172B-7787-D66931AD7AA4}"/>
+                <a16:creationId xmlns:a16="http://schemas.microsoft.com/office/drawing/2014/main" id="{2FB75AE2-D0C9-B656-1704-8DD53283F936}"/>
               </a:ext>
             </a:extLst>
           </p:cNvPr>
@@ -5122,20 +5178,14 @@
           <a:lstStyle/>
           <a:p>
             <a:r>
-              <a:rPr kumimoji="1" lang="en-US" altLang="ja-JP" sz="3400" b="1">
+              <a:rPr kumimoji="1" lang="ja-JP" altLang="en-US" sz="3400" b="1">
                 <a:solidFill>
                   <a:srgbClr val="111111"/>
                 </a:solidFill>
                 <a:latin typeface="Arial" panose="020B0604020202020204" pitchFamily="34" charset="0"/>
               </a:rPr>
-              <a:t>ITERATIVE IMPROVEMENT</a:t>
-            </a:r>
-            <a:endParaRPr kumimoji="1" lang="ja-JP" altLang="en-US" sz="3400" b="1">
-              <a:solidFill>
-                <a:srgbClr val="111111"/>
-              </a:solidFill>
-              <a:latin typeface="Arial" panose="020B0604020202020204" pitchFamily="34" charset="0"/>
-            </a:endParaRPr>
+              <a:t>コミットから分かる改善</a:t>
+            </a:r>
           </a:p>
         </p:txBody>
       </p:sp>
@@ -5144,7 +5194,7 @@
           <p:cNvPr id="4" name="テキスト ボックス 3">
             <a:extLst>
               <a:ext uri="{FF2B5EF4-FFF2-40B4-BE49-F238E27FC236}">
-                <a16:creationId xmlns:a16="http://schemas.microsoft.com/office/drawing/2014/main" id="{C7B004B8-1BFE-FF7E-684C-B398B35CB4CC}"/>
+                <a16:creationId xmlns:a16="http://schemas.microsoft.com/office/drawing/2014/main" id="{2CBC710E-2B23-370E-4642-6CF34A65ABE8}"/>
               </a:ext>
             </a:extLst>
           </p:cNvPr>
@@ -5174,7 +5224,7 @@
                 </a:solidFill>
                 <a:latin typeface="Arial" panose="020B0604020202020204" pitchFamily="34" charset="0"/>
               </a:rPr>
-              <a:t>Small commits continuously improve features, quality and release readiness.</a:t>
+              <a:t>Build shared GAME PORTAL JP API</a:t>
             </a:r>
             <a:endParaRPr kumimoji="1" lang="ja-JP" altLang="en-US" sz="2000">
               <a:solidFill>
@@ -5190,7 +5240,7 @@
           <p:cNvPr id="5" name="テキスト ボックス 4">
             <a:extLst>
               <a:ext uri="{FF2B5EF4-FFF2-40B4-BE49-F238E27FC236}">
-                <a16:creationId xmlns:a16="http://schemas.microsoft.com/office/drawing/2014/main" id="{01CDAED5-DBA4-D98B-F710-98FD59B98776}"/>
+                <a16:creationId xmlns:a16="http://schemas.microsoft.com/office/drawing/2014/main" id="{15BE57CC-FE9E-F4AB-3E1E-716FACEC24D7}"/>
               </a:ext>
             </a:extLst>
           </p:cNvPr>
@@ -5237,7 +5287,7 @@
             <a:hlinkClick r:id="" action="ppaction://media"/>
             <a:extLst>
               <a:ext uri="{FF2B5EF4-FFF2-40B4-BE49-F238E27FC236}">
-                <a16:creationId xmlns:a16="http://schemas.microsoft.com/office/drawing/2014/main" id="{4744C030-564B-72E0-9D12-27F4C74C1A93}"/>
+                <a16:creationId xmlns:a16="http://schemas.microsoft.com/office/drawing/2014/main" id="{2FE5B795-71A0-D481-E06D-673FEA269EDF}"/>
               </a:ext>
             </a:extLst>
           </p:cNvPr>
@@ -5272,7 +5322,7 @@
     </p:spTree>
     <p:extLst>
       <p:ext uri="{BB962C8B-B14F-4D97-AF65-F5344CB8AC3E}">
-        <p14:creationId xmlns:p14="http://schemas.microsoft.com/office/powerpoint/2010/main" val="320358962"/>
+        <p14:creationId xmlns:p14="http://schemas.microsoft.com/office/powerpoint/2010/main" val="4089671881"/>
       </p:ext>
     </p:extLst>
   </p:cSld>
@@ -5396,7 +5446,7 @@
           <p:cNvPr id="2" name="テキスト ボックス 1">
             <a:extLst>
               <a:ext uri="{FF2B5EF4-FFF2-40B4-BE49-F238E27FC236}">
-                <a16:creationId xmlns:a16="http://schemas.microsoft.com/office/drawing/2014/main" id="{A4E910D4-B1E8-733A-45AC-969A73BA98DB}"/>
+                <a16:creationId xmlns:a16="http://schemas.microsoft.com/office/drawing/2014/main" id="{C585FF94-ABD7-A2CD-9352-459363A06976}"/>
               </a:ext>
             </a:extLst>
           </p:cNvPr>
@@ -5442,7 +5492,7 @@
           <p:cNvPr id="3" name="テキスト ボックス 2">
             <a:extLst>
               <a:ext uri="{FF2B5EF4-FFF2-40B4-BE49-F238E27FC236}">
-                <a16:creationId xmlns:a16="http://schemas.microsoft.com/office/drawing/2014/main" id="{DAA20610-37BA-BF0F-BE19-3748799CEC53}"/>
+                <a16:creationId xmlns:a16="http://schemas.microsoft.com/office/drawing/2014/main" id="{94D05954-3FD1-180E-F0A6-7EB164EB7649}"/>
               </a:ext>
             </a:extLst>
           </p:cNvPr>
@@ -5466,20 +5516,14 @@
           <a:lstStyle/>
           <a:p>
             <a:r>
-              <a:rPr kumimoji="1" lang="en-US" altLang="ja-JP" sz="3400" b="1">
+              <a:rPr kumimoji="1" lang="ja-JP" altLang="en-US" sz="3400" b="1">
                 <a:solidFill>
                   <a:srgbClr val="111111"/>
                 </a:solidFill>
                 <a:latin typeface="Arial" panose="020B0604020202020204" pitchFamily="34" charset="0"/>
               </a:rPr>
-              <a:t>READ THE FULL ARTICLE</a:t>
-            </a:r>
-            <a:endParaRPr kumimoji="1" lang="ja-JP" altLang="en-US" sz="3400" b="1">
-              <a:solidFill>
-                <a:srgbClr val="111111"/>
-              </a:solidFill>
-              <a:latin typeface="Arial" panose="020B0604020202020204" pitchFamily="34" charset="0"/>
-            </a:endParaRPr>
+              <a:t>詳しくは積み上げログへ</a:t>
+            </a:r>
           </a:p>
         </p:txBody>
       </p:sp>
@@ -5488,7 +5532,7 @@
           <p:cNvPr id="4" name="テキスト ボックス 3">
             <a:extLst>
               <a:ext uri="{FF2B5EF4-FFF2-40B4-BE49-F238E27FC236}">
-                <a16:creationId xmlns:a16="http://schemas.microsoft.com/office/drawing/2014/main" id="{E8729A82-266B-14AB-728D-0AA1D6A872DE}"/>
+                <a16:creationId xmlns:a16="http://schemas.microsoft.com/office/drawing/2014/main" id="{BC61C970-A4E1-E1D3-B57F-826AAC54A725}"/>
               </a:ext>
             </a:extLst>
           </p:cNvPr>
@@ -5512,14 +5556,32 @@
           <a:lstStyle/>
           <a:p>
             <a:r>
-              <a:rPr kumimoji="1" lang="sv-SE" altLang="ja-JP" sz="2000">
+              <a:rPr kumimoji="1" lang="zh-TW" altLang="en-US" sz="2000">
+                <a:solidFill>
+                  <a:srgbClr val="333333"/>
+                </a:solidFill>
+                <a:latin typeface="Arial" panose="020B0604020202020204" pitchFamily="34" charset="0"/>
+              </a:rPr>
+              <a:t>記事： </a:t>
+            </a:r>
+            <a:r>
+              <a:rPr kumimoji="1" lang="en-US" altLang="zh-TW" sz="2000">
                 <a:solidFill>
                   <a:srgbClr val="333333"/>
                 </a:solidFill>
                 <a:latin typeface="Arial" panose="020B0604020202020204" pitchFamily="34" charset="0"/>
               </a:rPr>
               <a:t>https://syunnjack.dev/articles/retro-new-games-api
-TSUMIAGE LOG</a:t>
+</a:t>
+            </a:r>
+            <a:r>
+              <a:rPr kumimoji="1" lang="zh-TW" altLang="en-US" sz="2000">
+                <a:solidFill>
+                  <a:srgbClr val="333333"/>
+                </a:solidFill>
+                <a:latin typeface="Arial" panose="020B0604020202020204" pitchFamily="34" charset="0"/>
+              </a:rPr>
+              <a:t>学び、作り、振り返る開発記録。</a:t>
             </a:r>
             <a:endParaRPr kumimoji="1" lang="ja-JP" altLang="en-US" sz="2000">
               <a:solidFill>
@@ -5535,7 +5597,7 @@
           <p:cNvPr id="5" name="テキスト ボックス 4">
             <a:extLst>
               <a:ext uri="{FF2B5EF4-FFF2-40B4-BE49-F238E27FC236}">
-                <a16:creationId xmlns:a16="http://schemas.microsoft.com/office/drawing/2014/main" id="{8A83246A-EA69-87D6-E869-5F27BB8EF318}"/>
+                <a16:creationId xmlns:a16="http://schemas.microsoft.com/office/drawing/2014/main" id="{0D2357D2-1AD6-37BC-CE5D-2F09A64EBE21}"/>
               </a:ext>
             </a:extLst>
           </p:cNvPr>
@@ -5582,7 +5644,7 @@
             <a:hlinkClick r:id="" action="ppaction://media"/>
             <a:extLst>
               <a:ext uri="{FF2B5EF4-FFF2-40B4-BE49-F238E27FC236}">
-                <a16:creationId xmlns:a16="http://schemas.microsoft.com/office/drawing/2014/main" id="{56EB190F-0D07-4319-D635-C4792BA98891}"/>
+                <a16:creationId xmlns:a16="http://schemas.microsoft.com/office/drawing/2014/main" id="{72745D3F-A480-3F8C-331B-13BE21186CBF}"/>
               </a:ext>
             </a:extLst>
           </p:cNvPr>
@@ -5617,7 +5679,7 @@
     </p:spTree>
     <p:extLst>
       <p:ext uri="{BB962C8B-B14F-4D97-AF65-F5344CB8AC3E}">
-        <p14:creationId xmlns:p14="http://schemas.microsoft.com/office/powerpoint/2010/main" val="2549444199"/>
+        <p14:creationId xmlns:p14="http://schemas.microsoft.com/office/powerpoint/2010/main" val="3642790281"/>
       </p:ext>
     </p:extLst>
   </p:cSld>

--- a/public/videos/repositories/retro-new-games-api/retro-new-games-api-tech-preview.pptx
+++ b/public/videos/repositories/retro-new-games-api/retro-new-games-api-tech-preview.pptx
@@ -134,7 +134,7 @@
           <p:cNvPr id="2" name="タイトル 1">
             <a:extLst>
               <a:ext uri="{FF2B5EF4-FFF2-40B4-BE49-F238E27FC236}">
-                <a16:creationId xmlns:a16="http://schemas.microsoft.com/office/drawing/2014/main" id="{1CFAD7A4-06FE-A10F-1C9C-787B97A69D2C}"/>
+                <a16:creationId xmlns:a16="http://schemas.microsoft.com/office/drawing/2014/main" id="{2E2D30E9-948D-158D-88CD-32C1C69C33BC}"/>
               </a:ext>
             </a:extLst>
           </p:cNvPr>
@@ -171,7 +171,7 @@
           <p:cNvPr id="3" name="字幕 2">
             <a:extLst>
               <a:ext uri="{FF2B5EF4-FFF2-40B4-BE49-F238E27FC236}">
-                <a16:creationId xmlns:a16="http://schemas.microsoft.com/office/drawing/2014/main" id="{8B332A37-1B21-78D1-C841-A7372EC6B08C}"/>
+                <a16:creationId xmlns:a16="http://schemas.microsoft.com/office/drawing/2014/main" id="{AE1AEF71-145E-0BC7-0C7D-DA4137409C6C}"/>
               </a:ext>
             </a:extLst>
           </p:cNvPr>
@@ -241,7 +241,7 @@
           <p:cNvPr id="4" name="日付プレースホルダー 3">
             <a:extLst>
               <a:ext uri="{FF2B5EF4-FFF2-40B4-BE49-F238E27FC236}">
-                <a16:creationId xmlns:a16="http://schemas.microsoft.com/office/drawing/2014/main" id="{5E55F7E0-76B9-51EE-A98F-5B5D71A68E3B}"/>
+                <a16:creationId xmlns:a16="http://schemas.microsoft.com/office/drawing/2014/main" id="{EB445E08-845A-D14D-ED0C-A410E5E26D62}"/>
               </a:ext>
             </a:extLst>
           </p:cNvPr>
@@ -257,7 +257,7 @@
           <a:bodyPr/>
           <a:lstStyle/>
           <a:p>
-            <a:fld id="{A790249F-FB65-43FE-B7F4-EC47FBA5CFDF}" type="datetimeFigureOut">
+            <a:fld id="{75421D55-B1A8-4C83-A1AB-5D9C1CEEC9BF}" type="datetimeFigureOut">
               <a:rPr kumimoji="1" lang="ja-JP" altLang="en-US" smtClean="0"/>
               <a:t>2026/7/30</a:t>
             </a:fld>
@@ -270,7 +270,7 @@
           <p:cNvPr id="5" name="フッター プレースホルダー 4">
             <a:extLst>
               <a:ext uri="{FF2B5EF4-FFF2-40B4-BE49-F238E27FC236}">
-                <a16:creationId xmlns:a16="http://schemas.microsoft.com/office/drawing/2014/main" id="{C8F7BC87-DE48-711E-BECB-1664C1DCF487}"/>
+                <a16:creationId xmlns:a16="http://schemas.microsoft.com/office/drawing/2014/main" id="{49973F54-5D22-8DAF-2BEA-9B50C06025F7}"/>
               </a:ext>
             </a:extLst>
           </p:cNvPr>
@@ -295,7 +295,7 @@
           <p:cNvPr id="6" name="スライド番号プレースホルダー 5">
             <a:extLst>
               <a:ext uri="{FF2B5EF4-FFF2-40B4-BE49-F238E27FC236}">
-                <a16:creationId xmlns:a16="http://schemas.microsoft.com/office/drawing/2014/main" id="{CB43D0BE-ED6E-8BDD-ABB2-5D998A73BAEE}"/>
+                <a16:creationId xmlns:a16="http://schemas.microsoft.com/office/drawing/2014/main" id="{C28A00A1-5BA1-44E6-29F4-78DA87633513}"/>
               </a:ext>
             </a:extLst>
           </p:cNvPr>
@@ -311,7 +311,7 @@
           <a:bodyPr/>
           <a:lstStyle/>
           <a:p>
-            <a:fld id="{58B0269A-8420-4C54-ADE6-B4C01A886CD9}" type="slidenum">
+            <a:fld id="{74AD17F4-8DA2-4325-9390-C894918AC914}" type="slidenum">
               <a:rPr kumimoji="1" lang="ja-JP" altLang="en-US" smtClean="0"/>
               <a:t>‹#›</a:t>
             </a:fld>
@@ -322,7 +322,7 @@
     </p:spTree>
     <p:extLst>
       <p:ext uri="{BB962C8B-B14F-4D97-AF65-F5344CB8AC3E}">
-        <p14:creationId xmlns:p14="http://schemas.microsoft.com/office/powerpoint/2010/main" val="2175856878"/>
+        <p14:creationId xmlns:p14="http://schemas.microsoft.com/office/powerpoint/2010/main" val="265320038"/>
       </p:ext>
     </p:extLst>
   </p:cSld>
@@ -354,7 +354,7 @@
           <p:cNvPr id="2" name="タイトル 1">
             <a:extLst>
               <a:ext uri="{FF2B5EF4-FFF2-40B4-BE49-F238E27FC236}">
-                <a16:creationId xmlns:a16="http://schemas.microsoft.com/office/drawing/2014/main" id="{BA11A97C-DF45-B648-AC4B-5E30DDF577E8}"/>
+                <a16:creationId xmlns:a16="http://schemas.microsoft.com/office/drawing/2014/main" id="{79803067-8CE0-2172-05BA-2CCD0A1CE33A}"/>
               </a:ext>
             </a:extLst>
           </p:cNvPr>
@@ -382,7 +382,7 @@
           <p:cNvPr id="3" name="縦書きテキスト プレースホルダー 2">
             <a:extLst>
               <a:ext uri="{FF2B5EF4-FFF2-40B4-BE49-F238E27FC236}">
-                <a16:creationId xmlns:a16="http://schemas.microsoft.com/office/drawing/2014/main" id="{611EF9A5-848A-EB6A-DCC6-31BDFE1EA5D2}"/>
+                <a16:creationId xmlns:a16="http://schemas.microsoft.com/office/drawing/2014/main" id="{58CB7CC5-2336-E24E-35B9-858D91950C44}"/>
               </a:ext>
             </a:extLst>
           </p:cNvPr>
@@ -471,7 +471,7 @@
           <p:cNvPr id="4" name="日付プレースホルダー 3">
             <a:extLst>
               <a:ext uri="{FF2B5EF4-FFF2-40B4-BE49-F238E27FC236}">
-                <a16:creationId xmlns:a16="http://schemas.microsoft.com/office/drawing/2014/main" id="{50C48183-C53C-EFBB-CD55-B36259E83CBE}"/>
+                <a16:creationId xmlns:a16="http://schemas.microsoft.com/office/drawing/2014/main" id="{D451C8D2-CFB4-3566-69B8-B71D9A9920DF}"/>
               </a:ext>
             </a:extLst>
           </p:cNvPr>
@@ -487,7 +487,7 @@
           <a:bodyPr/>
           <a:lstStyle/>
           <a:p>
-            <a:fld id="{A790249F-FB65-43FE-B7F4-EC47FBA5CFDF}" type="datetimeFigureOut">
+            <a:fld id="{75421D55-B1A8-4C83-A1AB-5D9C1CEEC9BF}" type="datetimeFigureOut">
               <a:rPr kumimoji="1" lang="ja-JP" altLang="en-US" smtClean="0"/>
               <a:t>2026/7/30</a:t>
             </a:fld>
@@ -500,7 +500,7 @@
           <p:cNvPr id="5" name="フッター プレースホルダー 4">
             <a:extLst>
               <a:ext uri="{FF2B5EF4-FFF2-40B4-BE49-F238E27FC236}">
-                <a16:creationId xmlns:a16="http://schemas.microsoft.com/office/drawing/2014/main" id="{5B7FF308-BF4C-F70F-BDD5-5AE9E43B8088}"/>
+                <a16:creationId xmlns:a16="http://schemas.microsoft.com/office/drawing/2014/main" id="{A5986FCD-38D7-B2D0-492E-D74295BC7ACF}"/>
               </a:ext>
             </a:extLst>
           </p:cNvPr>
@@ -525,7 +525,7 @@
           <p:cNvPr id="6" name="スライド番号プレースホルダー 5">
             <a:extLst>
               <a:ext uri="{FF2B5EF4-FFF2-40B4-BE49-F238E27FC236}">
-                <a16:creationId xmlns:a16="http://schemas.microsoft.com/office/drawing/2014/main" id="{A1C3C5FB-7686-21BE-CB5E-B4B49D053DDE}"/>
+                <a16:creationId xmlns:a16="http://schemas.microsoft.com/office/drawing/2014/main" id="{5DB5587B-B717-DDDF-E5B5-637ECB09F1D4}"/>
               </a:ext>
             </a:extLst>
           </p:cNvPr>
@@ -541,7 +541,7 @@
           <a:bodyPr/>
           <a:lstStyle/>
           <a:p>
-            <a:fld id="{58B0269A-8420-4C54-ADE6-B4C01A886CD9}" type="slidenum">
+            <a:fld id="{74AD17F4-8DA2-4325-9390-C894918AC914}" type="slidenum">
               <a:rPr kumimoji="1" lang="ja-JP" altLang="en-US" smtClean="0"/>
               <a:t>‹#›</a:t>
             </a:fld>
@@ -552,7 +552,7 @@
     </p:spTree>
     <p:extLst>
       <p:ext uri="{BB962C8B-B14F-4D97-AF65-F5344CB8AC3E}">
-        <p14:creationId xmlns:p14="http://schemas.microsoft.com/office/powerpoint/2010/main" val="3021025414"/>
+        <p14:creationId xmlns:p14="http://schemas.microsoft.com/office/powerpoint/2010/main" val="3882344136"/>
       </p:ext>
     </p:extLst>
   </p:cSld>
@@ -584,7 +584,7 @@
           <p:cNvPr id="2" name="縦書きタイトル 1">
             <a:extLst>
               <a:ext uri="{FF2B5EF4-FFF2-40B4-BE49-F238E27FC236}">
-                <a16:creationId xmlns:a16="http://schemas.microsoft.com/office/drawing/2014/main" id="{D7C85415-478F-5D19-765A-CBBB68C1622F}"/>
+                <a16:creationId xmlns:a16="http://schemas.microsoft.com/office/drawing/2014/main" id="{5B2532F5-654D-86D0-4C02-8C93B9752C33}"/>
               </a:ext>
             </a:extLst>
           </p:cNvPr>
@@ -617,7 +617,7 @@
           <p:cNvPr id="3" name="縦書きテキスト プレースホルダー 2">
             <a:extLst>
               <a:ext uri="{FF2B5EF4-FFF2-40B4-BE49-F238E27FC236}">
-                <a16:creationId xmlns:a16="http://schemas.microsoft.com/office/drawing/2014/main" id="{BD248DA4-5B0C-86A2-D8CC-9A334039ECD9}"/>
+                <a16:creationId xmlns:a16="http://schemas.microsoft.com/office/drawing/2014/main" id="{7C49B3B4-FD7A-47DB-594F-BD1AACDE6A45}"/>
               </a:ext>
             </a:extLst>
           </p:cNvPr>
@@ -711,7 +711,7 @@
           <p:cNvPr id="4" name="日付プレースホルダー 3">
             <a:extLst>
               <a:ext uri="{FF2B5EF4-FFF2-40B4-BE49-F238E27FC236}">
-                <a16:creationId xmlns:a16="http://schemas.microsoft.com/office/drawing/2014/main" id="{7582D689-9163-923F-7FF9-DE2B57E41A6E}"/>
+                <a16:creationId xmlns:a16="http://schemas.microsoft.com/office/drawing/2014/main" id="{FA07B4C6-529F-039E-5236-D4F24DB37CE1}"/>
               </a:ext>
             </a:extLst>
           </p:cNvPr>
@@ -727,7 +727,7 @@
           <a:bodyPr/>
           <a:lstStyle/>
           <a:p>
-            <a:fld id="{A790249F-FB65-43FE-B7F4-EC47FBA5CFDF}" type="datetimeFigureOut">
+            <a:fld id="{75421D55-B1A8-4C83-A1AB-5D9C1CEEC9BF}" type="datetimeFigureOut">
               <a:rPr kumimoji="1" lang="ja-JP" altLang="en-US" smtClean="0"/>
               <a:t>2026/7/30</a:t>
             </a:fld>
@@ -740,7 +740,7 @@
           <p:cNvPr id="5" name="フッター プレースホルダー 4">
             <a:extLst>
               <a:ext uri="{FF2B5EF4-FFF2-40B4-BE49-F238E27FC236}">
-                <a16:creationId xmlns:a16="http://schemas.microsoft.com/office/drawing/2014/main" id="{200BFDD0-D6AB-DBE8-F882-451B716AFA95}"/>
+                <a16:creationId xmlns:a16="http://schemas.microsoft.com/office/drawing/2014/main" id="{B9BD143B-47AA-28F1-4383-22D8C7738427}"/>
               </a:ext>
             </a:extLst>
           </p:cNvPr>
@@ -765,7 +765,7 @@
           <p:cNvPr id="6" name="スライド番号プレースホルダー 5">
             <a:extLst>
               <a:ext uri="{FF2B5EF4-FFF2-40B4-BE49-F238E27FC236}">
-                <a16:creationId xmlns:a16="http://schemas.microsoft.com/office/drawing/2014/main" id="{FDFEC0E8-47E7-C21C-F7C3-6A5AC488BBEB}"/>
+                <a16:creationId xmlns:a16="http://schemas.microsoft.com/office/drawing/2014/main" id="{7DFEDE81-B241-F7E9-ABF6-9A8433A4B16D}"/>
               </a:ext>
             </a:extLst>
           </p:cNvPr>
@@ -781,7 +781,7 @@
           <a:bodyPr/>
           <a:lstStyle/>
           <a:p>
-            <a:fld id="{58B0269A-8420-4C54-ADE6-B4C01A886CD9}" type="slidenum">
+            <a:fld id="{74AD17F4-8DA2-4325-9390-C894918AC914}" type="slidenum">
               <a:rPr kumimoji="1" lang="ja-JP" altLang="en-US" smtClean="0"/>
               <a:t>‹#›</a:t>
             </a:fld>
@@ -792,7 +792,7 @@
     </p:spTree>
     <p:extLst>
       <p:ext uri="{BB962C8B-B14F-4D97-AF65-F5344CB8AC3E}">
-        <p14:creationId xmlns:p14="http://schemas.microsoft.com/office/powerpoint/2010/main" val="3357541299"/>
+        <p14:creationId xmlns:p14="http://schemas.microsoft.com/office/powerpoint/2010/main" val="1766679623"/>
       </p:ext>
     </p:extLst>
   </p:cSld>
@@ -824,7 +824,7 @@
           <p:cNvPr id="2" name="タイトル 1">
             <a:extLst>
               <a:ext uri="{FF2B5EF4-FFF2-40B4-BE49-F238E27FC236}">
-                <a16:creationId xmlns:a16="http://schemas.microsoft.com/office/drawing/2014/main" id="{BA811693-BDEE-06C3-BB89-818D7BDCCF9F}"/>
+                <a16:creationId xmlns:a16="http://schemas.microsoft.com/office/drawing/2014/main" id="{12B380E5-AA4C-AD95-EF6A-EE54C8A356A6}"/>
               </a:ext>
             </a:extLst>
           </p:cNvPr>
@@ -852,7 +852,7 @@
           <p:cNvPr id="3" name="コンテンツ プレースホルダー 2">
             <a:extLst>
               <a:ext uri="{FF2B5EF4-FFF2-40B4-BE49-F238E27FC236}">
-                <a16:creationId xmlns:a16="http://schemas.microsoft.com/office/drawing/2014/main" id="{C4FF566F-CEDF-8F6A-4AFB-090C931291F3}"/>
+                <a16:creationId xmlns:a16="http://schemas.microsoft.com/office/drawing/2014/main" id="{10F823E1-70E4-6A4B-2C20-256BB8091D39}"/>
               </a:ext>
             </a:extLst>
           </p:cNvPr>
@@ -941,7 +941,7 @@
           <p:cNvPr id="4" name="日付プレースホルダー 3">
             <a:extLst>
               <a:ext uri="{FF2B5EF4-FFF2-40B4-BE49-F238E27FC236}">
-                <a16:creationId xmlns:a16="http://schemas.microsoft.com/office/drawing/2014/main" id="{90B16EE2-D8F8-AADB-D14C-AD92A7F70019}"/>
+                <a16:creationId xmlns:a16="http://schemas.microsoft.com/office/drawing/2014/main" id="{C89D2A8B-B00C-452B-6EA8-BDDFC280E572}"/>
               </a:ext>
             </a:extLst>
           </p:cNvPr>
@@ -957,7 +957,7 @@
           <a:bodyPr/>
           <a:lstStyle/>
           <a:p>
-            <a:fld id="{A790249F-FB65-43FE-B7F4-EC47FBA5CFDF}" type="datetimeFigureOut">
+            <a:fld id="{75421D55-B1A8-4C83-A1AB-5D9C1CEEC9BF}" type="datetimeFigureOut">
               <a:rPr kumimoji="1" lang="ja-JP" altLang="en-US" smtClean="0"/>
               <a:t>2026/7/30</a:t>
             </a:fld>
@@ -970,7 +970,7 @@
           <p:cNvPr id="5" name="フッター プレースホルダー 4">
             <a:extLst>
               <a:ext uri="{FF2B5EF4-FFF2-40B4-BE49-F238E27FC236}">
-                <a16:creationId xmlns:a16="http://schemas.microsoft.com/office/drawing/2014/main" id="{B1776D94-C677-4AFB-57C6-E1E8EB494C2A}"/>
+                <a16:creationId xmlns:a16="http://schemas.microsoft.com/office/drawing/2014/main" id="{E304D87F-D49C-FB4E-E106-C56E152B63BA}"/>
               </a:ext>
             </a:extLst>
           </p:cNvPr>
@@ -995,7 +995,7 @@
           <p:cNvPr id="6" name="スライド番号プレースホルダー 5">
             <a:extLst>
               <a:ext uri="{FF2B5EF4-FFF2-40B4-BE49-F238E27FC236}">
-                <a16:creationId xmlns:a16="http://schemas.microsoft.com/office/drawing/2014/main" id="{21A9A45F-ED6D-F3C0-B231-70D0A9F63EA2}"/>
+                <a16:creationId xmlns:a16="http://schemas.microsoft.com/office/drawing/2014/main" id="{5672AE9C-7A97-9A7A-4703-62BFF019B3F6}"/>
               </a:ext>
             </a:extLst>
           </p:cNvPr>
@@ -1011,7 +1011,7 @@
           <a:bodyPr/>
           <a:lstStyle/>
           <a:p>
-            <a:fld id="{58B0269A-8420-4C54-ADE6-B4C01A886CD9}" type="slidenum">
+            <a:fld id="{74AD17F4-8DA2-4325-9390-C894918AC914}" type="slidenum">
               <a:rPr kumimoji="1" lang="ja-JP" altLang="en-US" smtClean="0"/>
               <a:t>‹#›</a:t>
             </a:fld>
@@ -1022,7 +1022,7 @@
     </p:spTree>
     <p:extLst>
       <p:ext uri="{BB962C8B-B14F-4D97-AF65-F5344CB8AC3E}">
-        <p14:creationId xmlns:p14="http://schemas.microsoft.com/office/powerpoint/2010/main" val="1872503034"/>
+        <p14:creationId xmlns:p14="http://schemas.microsoft.com/office/powerpoint/2010/main" val="1646348982"/>
       </p:ext>
     </p:extLst>
   </p:cSld>
@@ -1054,7 +1054,7 @@
           <p:cNvPr id="2" name="タイトル 1">
             <a:extLst>
               <a:ext uri="{FF2B5EF4-FFF2-40B4-BE49-F238E27FC236}">
-                <a16:creationId xmlns:a16="http://schemas.microsoft.com/office/drawing/2014/main" id="{64703178-5B00-6AD8-05A5-EC025FD03D27}"/>
+                <a16:creationId xmlns:a16="http://schemas.microsoft.com/office/drawing/2014/main" id="{F00E796C-341A-E6A8-C095-A1ECEA562EC8}"/>
               </a:ext>
             </a:extLst>
           </p:cNvPr>
@@ -1091,7 +1091,7 @@
           <p:cNvPr id="3" name="テキスト プレースホルダー 2">
             <a:extLst>
               <a:ext uri="{FF2B5EF4-FFF2-40B4-BE49-F238E27FC236}">
-                <a16:creationId xmlns:a16="http://schemas.microsoft.com/office/drawing/2014/main" id="{E16EAC7F-7993-539D-49FF-C17807DA6D26}"/>
+                <a16:creationId xmlns:a16="http://schemas.microsoft.com/office/drawing/2014/main" id="{A0F7A11B-D96C-21E5-C4C6-2D820105321C}"/>
               </a:ext>
             </a:extLst>
           </p:cNvPr>
@@ -1216,7 +1216,7 @@
           <p:cNvPr id="4" name="日付プレースホルダー 3">
             <a:extLst>
               <a:ext uri="{FF2B5EF4-FFF2-40B4-BE49-F238E27FC236}">
-                <a16:creationId xmlns:a16="http://schemas.microsoft.com/office/drawing/2014/main" id="{0078C16B-B5A7-1866-4C86-C35E9F103BA2}"/>
+                <a16:creationId xmlns:a16="http://schemas.microsoft.com/office/drawing/2014/main" id="{04E71886-4A83-F6F3-CD71-A63FB791D6D8}"/>
               </a:ext>
             </a:extLst>
           </p:cNvPr>
@@ -1232,7 +1232,7 @@
           <a:bodyPr/>
           <a:lstStyle/>
           <a:p>
-            <a:fld id="{A790249F-FB65-43FE-B7F4-EC47FBA5CFDF}" type="datetimeFigureOut">
+            <a:fld id="{75421D55-B1A8-4C83-A1AB-5D9C1CEEC9BF}" type="datetimeFigureOut">
               <a:rPr kumimoji="1" lang="ja-JP" altLang="en-US" smtClean="0"/>
               <a:t>2026/7/30</a:t>
             </a:fld>
@@ -1245,7 +1245,7 @@
           <p:cNvPr id="5" name="フッター プレースホルダー 4">
             <a:extLst>
               <a:ext uri="{FF2B5EF4-FFF2-40B4-BE49-F238E27FC236}">
-                <a16:creationId xmlns:a16="http://schemas.microsoft.com/office/drawing/2014/main" id="{43134A9E-4ADB-2E3B-432A-92B1C8BD1B80}"/>
+                <a16:creationId xmlns:a16="http://schemas.microsoft.com/office/drawing/2014/main" id="{7169B5B8-E9FA-EA82-C2B2-2CB2135B9772}"/>
               </a:ext>
             </a:extLst>
           </p:cNvPr>
@@ -1270,7 +1270,7 @@
           <p:cNvPr id="6" name="スライド番号プレースホルダー 5">
             <a:extLst>
               <a:ext uri="{FF2B5EF4-FFF2-40B4-BE49-F238E27FC236}">
-                <a16:creationId xmlns:a16="http://schemas.microsoft.com/office/drawing/2014/main" id="{2F91CA58-6156-845F-4398-5F4531D4B44C}"/>
+                <a16:creationId xmlns:a16="http://schemas.microsoft.com/office/drawing/2014/main" id="{3F54F276-8728-8598-AA3E-66A4C0AA3AA7}"/>
               </a:ext>
             </a:extLst>
           </p:cNvPr>
@@ -1286,7 +1286,7 @@
           <a:bodyPr/>
           <a:lstStyle/>
           <a:p>
-            <a:fld id="{58B0269A-8420-4C54-ADE6-B4C01A886CD9}" type="slidenum">
+            <a:fld id="{74AD17F4-8DA2-4325-9390-C894918AC914}" type="slidenum">
               <a:rPr kumimoji="1" lang="ja-JP" altLang="en-US" smtClean="0"/>
               <a:t>‹#›</a:t>
             </a:fld>
@@ -1297,7 +1297,7 @@
     </p:spTree>
     <p:extLst>
       <p:ext uri="{BB962C8B-B14F-4D97-AF65-F5344CB8AC3E}">
-        <p14:creationId xmlns:p14="http://schemas.microsoft.com/office/powerpoint/2010/main" val="4263522135"/>
+        <p14:creationId xmlns:p14="http://schemas.microsoft.com/office/powerpoint/2010/main" val="1913334901"/>
       </p:ext>
     </p:extLst>
   </p:cSld>
@@ -1329,7 +1329,7 @@
           <p:cNvPr id="2" name="タイトル 1">
             <a:extLst>
               <a:ext uri="{FF2B5EF4-FFF2-40B4-BE49-F238E27FC236}">
-                <a16:creationId xmlns:a16="http://schemas.microsoft.com/office/drawing/2014/main" id="{0F56C25C-D530-71D8-9EB1-256457623A7C}"/>
+                <a16:creationId xmlns:a16="http://schemas.microsoft.com/office/drawing/2014/main" id="{56252E10-C265-9C26-CBB8-A47DB7B721EF}"/>
               </a:ext>
             </a:extLst>
           </p:cNvPr>
@@ -1357,7 +1357,7 @@
           <p:cNvPr id="3" name="コンテンツ プレースホルダー 2">
             <a:extLst>
               <a:ext uri="{FF2B5EF4-FFF2-40B4-BE49-F238E27FC236}">
-                <a16:creationId xmlns:a16="http://schemas.microsoft.com/office/drawing/2014/main" id="{C3D3FAA5-7A79-84B8-4DAE-0C4A7E177405}"/>
+                <a16:creationId xmlns:a16="http://schemas.microsoft.com/office/drawing/2014/main" id="{077FAB36-5E7A-5513-4952-3D52C75AC5BB}"/>
               </a:ext>
             </a:extLst>
           </p:cNvPr>
@@ -1451,7 +1451,7 @@
           <p:cNvPr id="4" name="コンテンツ プレースホルダー 3">
             <a:extLst>
               <a:ext uri="{FF2B5EF4-FFF2-40B4-BE49-F238E27FC236}">
-                <a16:creationId xmlns:a16="http://schemas.microsoft.com/office/drawing/2014/main" id="{3865D67E-0093-F8EC-C3B8-1C62C1710EAF}"/>
+                <a16:creationId xmlns:a16="http://schemas.microsoft.com/office/drawing/2014/main" id="{2678C48F-AE06-A7FF-F003-0EFE0B6C5E0A}"/>
               </a:ext>
             </a:extLst>
           </p:cNvPr>
@@ -1545,7 +1545,7 @@
           <p:cNvPr id="5" name="日付プレースホルダー 4">
             <a:extLst>
               <a:ext uri="{FF2B5EF4-FFF2-40B4-BE49-F238E27FC236}">
-                <a16:creationId xmlns:a16="http://schemas.microsoft.com/office/drawing/2014/main" id="{30148A18-1997-F20C-1B00-A407A310DCBA}"/>
+                <a16:creationId xmlns:a16="http://schemas.microsoft.com/office/drawing/2014/main" id="{26A99947-076F-EA22-5EBE-296CD6F2B448}"/>
               </a:ext>
             </a:extLst>
           </p:cNvPr>
@@ -1561,7 +1561,7 @@
           <a:bodyPr/>
           <a:lstStyle/>
           <a:p>
-            <a:fld id="{A790249F-FB65-43FE-B7F4-EC47FBA5CFDF}" type="datetimeFigureOut">
+            <a:fld id="{75421D55-B1A8-4C83-A1AB-5D9C1CEEC9BF}" type="datetimeFigureOut">
               <a:rPr kumimoji="1" lang="ja-JP" altLang="en-US" smtClean="0"/>
               <a:t>2026/7/30</a:t>
             </a:fld>
@@ -1574,7 +1574,7 @@
           <p:cNvPr id="6" name="フッター プレースホルダー 5">
             <a:extLst>
               <a:ext uri="{FF2B5EF4-FFF2-40B4-BE49-F238E27FC236}">
-                <a16:creationId xmlns:a16="http://schemas.microsoft.com/office/drawing/2014/main" id="{EAC18B17-BEFA-A28F-B4DF-27F3ECDAA3A5}"/>
+                <a16:creationId xmlns:a16="http://schemas.microsoft.com/office/drawing/2014/main" id="{31D469CD-8AC1-C90E-56B6-3BEF1A1DDB40}"/>
               </a:ext>
             </a:extLst>
           </p:cNvPr>
@@ -1599,7 +1599,7 @@
           <p:cNvPr id="7" name="スライド番号プレースホルダー 6">
             <a:extLst>
               <a:ext uri="{FF2B5EF4-FFF2-40B4-BE49-F238E27FC236}">
-                <a16:creationId xmlns:a16="http://schemas.microsoft.com/office/drawing/2014/main" id="{62B10261-E973-9443-DFA6-BA753625AC0A}"/>
+                <a16:creationId xmlns:a16="http://schemas.microsoft.com/office/drawing/2014/main" id="{D4DE9FCF-D655-300F-47E2-F8396C143591}"/>
               </a:ext>
             </a:extLst>
           </p:cNvPr>
@@ -1615,7 +1615,7 @@
           <a:bodyPr/>
           <a:lstStyle/>
           <a:p>
-            <a:fld id="{58B0269A-8420-4C54-ADE6-B4C01A886CD9}" type="slidenum">
+            <a:fld id="{74AD17F4-8DA2-4325-9390-C894918AC914}" type="slidenum">
               <a:rPr kumimoji="1" lang="ja-JP" altLang="en-US" smtClean="0"/>
               <a:t>‹#›</a:t>
             </a:fld>
@@ -1626,7 +1626,7 @@
     </p:spTree>
     <p:extLst>
       <p:ext uri="{BB962C8B-B14F-4D97-AF65-F5344CB8AC3E}">
-        <p14:creationId xmlns:p14="http://schemas.microsoft.com/office/powerpoint/2010/main" val="3663521146"/>
+        <p14:creationId xmlns:p14="http://schemas.microsoft.com/office/powerpoint/2010/main" val="2730639494"/>
       </p:ext>
     </p:extLst>
   </p:cSld>
@@ -1658,7 +1658,7 @@
           <p:cNvPr id="2" name="タイトル 1">
             <a:extLst>
               <a:ext uri="{FF2B5EF4-FFF2-40B4-BE49-F238E27FC236}">
-                <a16:creationId xmlns:a16="http://schemas.microsoft.com/office/drawing/2014/main" id="{6018832A-1176-C4A5-74D0-644C65D24CA1}"/>
+                <a16:creationId xmlns:a16="http://schemas.microsoft.com/office/drawing/2014/main" id="{3816C44A-2D37-7ECB-E901-6C5FB3E3AD97}"/>
               </a:ext>
             </a:extLst>
           </p:cNvPr>
@@ -1691,7 +1691,7 @@
           <p:cNvPr id="3" name="テキスト プレースホルダー 2">
             <a:extLst>
               <a:ext uri="{FF2B5EF4-FFF2-40B4-BE49-F238E27FC236}">
-                <a16:creationId xmlns:a16="http://schemas.microsoft.com/office/drawing/2014/main" id="{7CB0BDC9-DDD1-1008-B9C1-ABC30AD1097B}"/>
+                <a16:creationId xmlns:a16="http://schemas.microsoft.com/office/drawing/2014/main" id="{BA168B38-FB7A-FE95-3B26-695307020443}"/>
               </a:ext>
             </a:extLst>
           </p:cNvPr>
@@ -1762,7 +1762,7 @@
           <p:cNvPr id="4" name="コンテンツ プレースホルダー 3">
             <a:extLst>
               <a:ext uri="{FF2B5EF4-FFF2-40B4-BE49-F238E27FC236}">
-                <a16:creationId xmlns:a16="http://schemas.microsoft.com/office/drawing/2014/main" id="{7DEE7334-3BC0-DF69-E87E-72E6DA66341C}"/>
+                <a16:creationId xmlns:a16="http://schemas.microsoft.com/office/drawing/2014/main" id="{A8CDE50F-403C-418B-0322-42463749E538}"/>
               </a:ext>
             </a:extLst>
           </p:cNvPr>
@@ -1856,7 +1856,7 @@
           <p:cNvPr id="5" name="テキスト プレースホルダー 4">
             <a:extLst>
               <a:ext uri="{FF2B5EF4-FFF2-40B4-BE49-F238E27FC236}">
-                <a16:creationId xmlns:a16="http://schemas.microsoft.com/office/drawing/2014/main" id="{C6F4D1A0-9D96-2C1B-1648-051262A24385}"/>
+                <a16:creationId xmlns:a16="http://schemas.microsoft.com/office/drawing/2014/main" id="{B853628D-3EA2-5513-28A5-A7DE210397E7}"/>
               </a:ext>
             </a:extLst>
           </p:cNvPr>
@@ -1927,7 +1927,7 @@
           <p:cNvPr id="6" name="コンテンツ プレースホルダー 5">
             <a:extLst>
               <a:ext uri="{FF2B5EF4-FFF2-40B4-BE49-F238E27FC236}">
-                <a16:creationId xmlns:a16="http://schemas.microsoft.com/office/drawing/2014/main" id="{70EF0038-535C-92FE-536C-F4456D39E64D}"/>
+                <a16:creationId xmlns:a16="http://schemas.microsoft.com/office/drawing/2014/main" id="{45E9A4E3-A08A-48B6-E4F2-BF755F3AC9D5}"/>
               </a:ext>
             </a:extLst>
           </p:cNvPr>
@@ -2021,7 +2021,7 @@
           <p:cNvPr id="7" name="日付プレースホルダー 6">
             <a:extLst>
               <a:ext uri="{FF2B5EF4-FFF2-40B4-BE49-F238E27FC236}">
-                <a16:creationId xmlns:a16="http://schemas.microsoft.com/office/drawing/2014/main" id="{49291720-23C6-FAF0-2460-CD8E28FD3267}"/>
+                <a16:creationId xmlns:a16="http://schemas.microsoft.com/office/drawing/2014/main" id="{DDB71A34-6FAC-49C9-10C8-E800AFCFA1D1}"/>
               </a:ext>
             </a:extLst>
           </p:cNvPr>
@@ -2037,7 +2037,7 @@
           <a:bodyPr/>
           <a:lstStyle/>
           <a:p>
-            <a:fld id="{A790249F-FB65-43FE-B7F4-EC47FBA5CFDF}" type="datetimeFigureOut">
+            <a:fld id="{75421D55-B1A8-4C83-A1AB-5D9C1CEEC9BF}" type="datetimeFigureOut">
               <a:rPr kumimoji="1" lang="ja-JP" altLang="en-US" smtClean="0"/>
               <a:t>2026/7/30</a:t>
             </a:fld>
@@ -2050,7 +2050,7 @@
           <p:cNvPr id="8" name="フッター プレースホルダー 7">
             <a:extLst>
               <a:ext uri="{FF2B5EF4-FFF2-40B4-BE49-F238E27FC236}">
-                <a16:creationId xmlns:a16="http://schemas.microsoft.com/office/drawing/2014/main" id="{C6F3CB6F-6E23-C2B4-F736-5474849F9E7A}"/>
+                <a16:creationId xmlns:a16="http://schemas.microsoft.com/office/drawing/2014/main" id="{1596FDA0-555F-873D-C6FD-04105EE9252B}"/>
               </a:ext>
             </a:extLst>
           </p:cNvPr>
@@ -2075,7 +2075,7 @@
           <p:cNvPr id="9" name="スライド番号プレースホルダー 8">
             <a:extLst>
               <a:ext uri="{FF2B5EF4-FFF2-40B4-BE49-F238E27FC236}">
-                <a16:creationId xmlns:a16="http://schemas.microsoft.com/office/drawing/2014/main" id="{A814D24E-181B-DAA4-1645-1D5EA9E8EFCB}"/>
+                <a16:creationId xmlns:a16="http://schemas.microsoft.com/office/drawing/2014/main" id="{4057B676-AF3F-0271-7F90-036B6D9F5C47}"/>
               </a:ext>
             </a:extLst>
           </p:cNvPr>
@@ -2091,7 +2091,7 @@
           <a:bodyPr/>
           <a:lstStyle/>
           <a:p>
-            <a:fld id="{58B0269A-8420-4C54-ADE6-B4C01A886CD9}" type="slidenum">
+            <a:fld id="{74AD17F4-8DA2-4325-9390-C894918AC914}" type="slidenum">
               <a:rPr kumimoji="1" lang="ja-JP" altLang="en-US" smtClean="0"/>
               <a:t>‹#›</a:t>
             </a:fld>
@@ -2102,7 +2102,7 @@
     </p:spTree>
     <p:extLst>
       <p:ext uri="{BB962C8B-B14F-4D97-AF65-F5344CB8AC3E}">
-        <p14:creationId xmlns:p14="http://schemas.microsoft.com/office/powerpoint/2010/main" val="2050892874"/>
+        <p14:creationId xmlns:p14="http://schemas.microsoft.com/office/powerpoint/2010/main" val="781128292"/>
       </p:ext>
     </p:extLst>
   </p:cSld>
@@ -2134,7 +2134,7 @@
           <p:cNvPr id="2" name="タイトル 1">
             <a:extLst>
               <a:ext uri="{FF2B5EF4-FFF2-40B4-BE49-F238E27FC236}">
-                <a16:creationId xmlns:a16="http://schemas.microsoft.com/office/drawing/2014/main" id="{C61711EF-F2B7-F781-5A26-39336C0A836A}"/>
+                <a16:creationId xmlns:a16="http://schemas.microsoft.com/office/drawing/2014/main" id="{AF638B48-9458-4F5E-64A7-AB6D0631FA65}"/>
               </a:ext>
             </a:extLst>
           </p:cNvPr>
@@ -2162,7 +2162,7 @@
           <p:cNvPr id="3" name="日付プレースホルダー 2">
             <a:extLst>
               <a:ext uri="{FF2B5EF4-FFF2-40B4-BE49-F238E27FC236}">
-                <a16:creationId xmlns:a16="http://schemas.microsoft.com/office/drawing/2014/main" id="{238EB9DC-B805-5836-8CA8-084396ADCFD0}"/>
+                <a16:creationId xmlns:a16="http://schemas.microsoft.com/office/drawing/2014/main" id="{E01059AE-4CED-81F8-F22F-CFE1A4E1E8F4}"/>
               </a:ext>
             </a:extLst>
           </p:cNvPr>
@@ -2178,7 +2178,7 @@
           <a:bodyPr/>
           <a:lstStyle/>
           <a:p>
-            <a:fld id="{A790249F-FB65-43FE-B7F4-EC47FBA5CFDF}" type="datetimeFigureOut">
+            <a:fld id="{75421D55-B1A8-4C83-A1AB-5D9C1CEEC9BF}" type="datetimeFigureOut">
               <a:rPr kumimoji="1" lang="ja-JP" altLang="en-US" smtClean="0"/>
               <a:t>2026/7/30</a:t>
             </a:fld>
@@ -2191,7 +2191,7 @@
           <p:cNvPr id="4" name="フッター プレースホルダー 3">
             <a:extLst>
               <a:ext uri="{FF2B5EF4-FFF2-40B4-BE49-F238E27FC236}">
-                <a16:creationId xmlns:a16="http://schemas.microsoft.com/office/drawing/2014/main" id="{65F0CA39-14E5-6742-AFD7-BBEAAF2E5D54}"/>
+                <a16:creationId xmlns:a16="http://schemas.microsoft.com/office/drawing/2014/main" id="{43FFD55D-4371-467C-0AE5-7C8FBF8C3BCF}"/>
               </a:ext>
             </a:extLst>
           </p:cNvPr>
@@ -2216,7 +2216,7 @@
           <p:cNvPr id="5" name="スライド番号プレースホルダー 4">
             <a:extLst>
               <a:ext uri="{FF2B5EF4-FFF2-40B4-BE49-F238E27FC236}">
-                <a16:creationId xmlns:a16="http://schemas.microsoft.com/office/drawing/2014/main" id="{85AA1757-DAE6-917E-A7BA-7291E1A7E4BA}"/>
+                <a16:creationId xmlns:a16="http://schemas.microsoft.com/office/drawing/2014/main" id="{0B26F967-341C-1EF0-B82B-3F9320250186}"/>
               </a:ext>
             </a:extLst>
           </p:cNvPr>
@@ -2232,7 +2232,7 @@
           <a:bodyPr/>
           <a:lstStyle/>
           <a:p>
-            <a:fld id="{58B0269A-8420-4C54-ADE6-B4C01A886CD9}" type="slidenum">
+            <a:fld id="{74AD17F4-8DA2-4325-9390-C894918AC914}" type="slidenum">
               <a:rPr kumimoji="1" lang="ja-JP" altLang="en-US" smtClean="0"/>
               <a:t>‹#›</a:t>
             </a:fld>
@@ -2243,7 +2243,7 @@
     </p:spTree>
     <p:extLst>
       <p:ext uri="{BB962C8B-B14F-4D97-AF65-F5344CB8AC3E}">
-        <p14:creationId xmlns:p14="http://schemas.microsoft.com/office/powerpoint/2010/main" val="1832360897"/>
+        <p14:creationId xmlns:p14="http://schemas.microsoft.com/office/powerpoint/2010/main" val="1960203211"/>
       </p:ext>
     </p:extLst>
   </p:cSld>
@@ -2275,7 +2275,7 @@
           <p:cNvPr id="2" name="日付プレースホルダー 1">
             <a:extLst>
               <a:ext uri="{FF2B5EF4-FFF2-40B4-BE49-F238E27FC236}">
-                <a16:creationId xmlns:a16="http://schemas.microsoft.com/office/drawing/2014/main" id="{FEC9D062-64AA-8915-E482-1EE03CE76562}"/>
+                <a16:creationId xmlns:a16="http://schemas.microsoft.com/office/drawing/2014/main" id="{0FAD1A9D-9337-85F1-0302-E80A1C8BDF44}"/>
               </a:ext>
             </a:extLst>
           </p:cNvPr>
@@ -2291,7 +2291,7 @@
           <a:bodyPr/>
           <a:lstStyle/>
           <a:p>
-            <a:fld id="{A790249F-FB65-43FE-B7F4-EC47FBA5CFDF}" type="datetimeFigureOut">
+            <a:fld id="{75421D55-B1A8-4C83-A1AB-5D9C1CEEC9BF}" type="datetimeFigureOut">
               <a:rPr kumimoji="1" lang="ja-JP" altLang="en-US" smtClean="0"/>
               <a:t>2026/7/30</a:t>
             </a:fld>
@@ -2304,7 +2304,7 @@
           <p:cNvPr id="3" name="フッター プレースホルダー 2">
             <a:extLst>
               <a:ext uri="{FF2B5EF4-FFF2-40B4-BE49-F238E27FC236}">
-                <a16:creationId xmlns:a16="http://schemas.microsoft.com/office/drawing/2014/main" id="{D1454216-C851-3743-17D9-22B11FBE5C25}"/>
+                <a16:creationId xmlns:a16="http://schemas.microsoft.com/office/drawing/2014/main" id="{78BFEF13-9135-437F-EADB-9D0048D05EF1}"/>
               </a:ext>
             </a:extLst>
           </p:cNvPr>
@@ -2329,7 +2329,7 @@
           <p:cNvPr id="4" name="スライド番号プレースホルダー 3">
             <a:extLst>
               <a:ext uri="{FF2B5EF4-FFF2-40B4-BE49-F238E27FC236}">
-                <a16:creationId xmlns:a16="http://schemas.microsoft.com/office/drawing/2014/main" id="{17503CB7-2C6F-A609-70DD-5D296ACEE49C}"/>
+                <a16:creationId xmlns:a16="http://schemas.microsoft.com/office/drawing/2014/main" id="{1E0CE3A2-30BD-6CB7-E1EB-FFFC5E91DBCA}"/>
               </a:ext>
             </a:extLst>
           </p:cNvPr>
@@ -2345,7 +2345,7 @@
           <a:bodyPr/>
           <a:lstStyle/>
           <a:p>
-            <a:fld id="{58B0269A-8420-4C54-ADE6-B4C01A886CD9}" type="slidenum">
+            <a:fld id="{74AD17F4-8DA2-4325-9390-C894918AC914}" type="slidenum">
               <a:rPr kumimoji="1" lang="ja-JP" altLang="en-US" smtClean="0"/>
               <a:t>‹#›</a:t>
             </a:fld>
@@ -2356,7 +2356,7 @@
     </p:spTree>
     <p:extLst>
       <p:ext uri="{BB962C8B-B14F-4D97-AF65-F5344CB8AC3E}">
-        <p14:creationId xmlns:p14="http://schemas.microsoft.com/office/powerpoint/2010/main" val="59004680"/>
+        <p14:creationId xmlns:p14="http://schemas.microsoft.com/office/powerpoint/2010/main" val="460749256"/>
       </p:ext>
     </p:extLst>
   </p:cSld>
@@ -2388,7 +2388,7 @@
           <p:cNvPr id="2" name="タイトル 1">
             <a:extLst>
               <a:ext uri="{FF2B5EF4-FFF2-40B4-BE49-F238E27FC236}">
-                <a16:creationId xmlns:a16="http://schemas.microsoft.com/office/drawing/2014/main" id="{6B31814C-788E-A3B3-9BED-7B11BE0E1CEB}"/>
+                <a16:creationId xmlns:a16="http://schemas.microsoft.com/office/drawing/2014/main" id="{F2D1ADED-5ED0-CFBE-341B-7686B0B3DD29}"/>
               </a:ext>
             </a:extLst>
           </p:cNvPr>
@@ -2425,7 +2425,7 @@
           <p:cNvPr id="3" name="コンテンツ プレースホルダー 2">
             <a:extLst>
               <a:ext uri="{FF2B5EF4-FFF2-40B4-BE49-F238E27FC236}">
-                <a16:creationId xmlns:a16="http://schemas.microsoft.com/office/drawing/2014/main" id="{2CD0D691-9B31-0C6D-F715-D52BEC9F3320}"/>
+                <a16:creationId xmlns:a16="http://schemas.microsoft.com/office/drawing/2014/main" id="{DDAA2F4C-66DB-98C0-7D83-857845BBBF74}"/>
               </a:ext>
             </a:extLst>
           </p:cNvPr>
@@ -2547,7 +2547,7 @@
           <p:cNvPr id="4" name="テキスト プレースホルダー 3">
             <a:extLst>
               <a:ext uri="{FF2B5EF4-FFF2-40B4-BE49-F238E27FC236}">
-                <a16:creationId xmlns:a16="http://schemas.microsoft.com/office/drawing/2014/main" id="{4F84C4CB-30CF-1A34-8A9F-016D94EBB039}"/>
+                <a16:creationId xmlns:a16="http://schemas.microsoft.com/office/drawing/2014/main" id="{8A362963-9748-9C6A-F6CC-6F2D1D90131A}"/>
               </a:ext>
             </a:extLst>
           </p:cNvPr>
@@ -2618,7 +2618,7 @@
           <p:cNvPr id="5" name="日付プレースホルダー 4">
             <a:extLst>
               <a:ext uri="{FF2B5EF4-FFF2-40B4-BE49-F238E27FC236}">
-                <a16:creationId xmlns:a16="http://schemas.microsoft.com/office/drawing/2014/main" id="{409C84DD-1825-E2CE-06FE-D80B6DBEF01A}"/>
+                <a16:creationId xmlns:a16="http://schemas.microsoft.com/office/drawing/2014/main" id="{7CA6102C-77A0-43F0-2272-A9573A5FB457}"/>
               </a:ext>
             </a:extLst>
           </p:cNvPr>
@@ -2634,7 +2634,7 @@
           <a:bodyPr/>
           <a:lstStyle/>
           <a:p>
-            <a:fld id="{A790249F-FB65-43FE-B7F4-EC47FBA5CFDF}" type="datetimeFigureOut">
+            <a:fld id="{75421D55-B1A8-4C83-A1AB-5D9C1CEEC9BF}" type="datetimeFigureOut">
               <a:rPr kumimoji="1" lang="ja-JP" altLang="en-US" smtClean="0"/>
               <a:t>2026/7/30</a:t>
             </a:fld>
@@ -2647,7 +2647,7 @@
           <p:cNvPr id="6" name="フッター プレースホルダー 5">
             <a:extLst>
               <a:ext uri="{FF2B5EF4-FFF2-40B4-BE49-F238E27FC236}">
-                <a16:creationId xmlns:a16="http://schemas.microsoft.com/office/drawing/2014/main" id="{56502F33-C22E-0CF2-B96E-E93A3B57362D}"/>
+                <a16:creationId xmlns:a16="http://schemas.microsoft.com/office/drawing/2014/main" id="{3B59B251-5163-4710-3170-A1F87188A9B2}"/>
               </a:ext>
             </a:extLst>
           </p:cNvPr>
@@ -2672,7 +2672,7 @@
           <p:cNvPr id="7" name="スライド番号プレースホルダー 6">
             <a:extLst>
               <a:ext uri="{FF2B5EF4-FFF2-40B4-BE49-F238E27FC236}">
-                <a16:creationId xmlns:a16="http://schemas.microsoft.com/office/drawing/2014/main" id="{B35BDADE-37DA-DC4A-C57F-4F3F6244A51B}"/>
+                <a16:creationId xmlns:a16="http://schemas.microsoft.com/office/drawing/2014/main" id="{ED4C473E-5E7F-D241-4FF8-E73037335D38}"/>
               </a:ext>
             </a:extLst>
           </p:cNvPr>
@@ -2688,7 +2688,7 @@
           <a:bodyPr/>
           <a:lstStyle/>
           <a:p>
-            <a:fld id="{58B0269A-8420-4C54-ADE6-B4C01A886CD9}" type="slidenum">
+            <a:fld id="{74AD17F4-8DA2-4325-9390-C894918AC914}" type="slidenum">
               <a:rPr kumimoji="1" lang="ja-JP" altLang="en-US" smtClean="0"/>
               <a:t>‹#›</a:t>
             </a:fld>
@@ -2699,7 +2699,7 @@
     </p:spTree>
     <p:extLst>
       <p:ext uri="{BB962C8B-B14F-4D97-AF65-F5344CB8AC3E}">
-        <p14:creationId xmlns:p14="http://schemas.microsoft.com/office/powerpoint/2010/main" val="1258925143"/>
+        <p14:creationId xmlns:p14="http://schemas.microsoft.com/office/powerpoint/2010/main" val="3956709953"/>
       </p:ext>
     </p:extLst>
   </p:cSld>
@@ -2731,7 +2731,7 @@
           <p:cNvPr id="2" name="タイトル 1">
             <a:extLst>
               <a:ext uri="{FF2B5EF4-FFF2-40B4-BE49-F238E27FC236}">
-                <a16:creationId xmlns:a16="http://schemas.microsoft.com/office/drawing/2014/main" id="{9A06C100-A448-323E-07CC-AA9D07716BBE}"/>
+                <a16:creationId xmlns:a16="http://schemas.microsoft.com/office/drawing/2014/main" id="{D30C9279-040C-C9E1-BECB-5AD489F9D4B7}"/>
               </a:ext>
             </a:extLst>
           </p:cNvPr>
@@ -2768,7 +2768,7 @@
           <p:cNvPr id="3" name="図プレースホルダー 2">
             <a:extLst>
               <a:ext uri="{FF2B5EF4-FFF2-40B4-BE49-F238E27FC236}">
-                <a16:creationId xmlns:a16="http://schemas.microsoft.com/office/drawing/2014/main" id="{B4575975-999D-1B51-03A6-1EC435288933}"/>
+                <a16:creationId xmlns:a16="http://schemas.microsoft.com/office/drawing/2014/main" id="{28F9D806-5A3F-65C0-5576-7F6C34A7B464}"/>
               </a:ext>
             </a:extLst>
           </p:cNvPr>
@@ -2835,7 +2835,7 @@
           <p:cNvPr id="4" name="テキスト プレースホルダー 3">
             <a:extLst>
               <a:ext uri="{FF2B5EF4-FFF2-40B4-BE49-F238E27FC236}">
-                <a16:creationId xmlns:a16="http://schemas.microsoft.com/office/drawing/2014/main" id="{F54E8F97-35BA-9FB4-B11C-DDD7653FC6B7}"/>
+                <a16:creationId xmlns:a16="http://schemas.microsoft.com/office/drawing/2014/main" id="{D180CBAA-B327-BFC0-5B82-1C269A21E226}"/>
               </a:ext>
             </a:extLst>
           </p:cNvPr>
@@ -2906,7 +2906,7 @@
           <p:cNvPr id="5" name="日付プレースホルダー 4">
             <a:extLst>
               <a:ext uri="{FF2B5EF4-FFF2-40B4-BE49-F238E27FC236}">
-                <a16:creationId xmlns:a16="http://schemas.microsoft.com/office/drawing/2014/main" id="{78CF84A7-E651-25FD-B84E-E89D0EE4B264}"/>
+                <a16:creationId xmlns:a16="http://schemas.microsoft.com/office/drawing/2014/main" id="{063DFBF5-006E-41FC-50BC-293F85B8EAC0}"/>
               </a:ext>
             </a:extLst>
           </p:cNvPr>
@@ -2922,7 +2922,7 @@
           <a:bodyPr/>
           <a:lstStyle/>
           <a:p>
-            <a:fld id="{A790249F-FB65-43FE-B7F4-EC47FBA5CFDF}" type="datetimeFigureOut">
+            <a:fld id="{75421D55-B1A8-4C83-A1AB-5D9C1CEEC9BF}" type="datetimeFigureOut">
               <a:rPr kumimoji="1" lang="ja-JP" altLang="en-US" smtClean="0"/>
               <a:t>2026/7/30</a:t>
             </a:fld>
@@ -2935,7 +2935,7 @@
           <p:cNvPr id="6" name="フッター プレースホルダー 5">
             <a:extLst>
               <a:ext uri="{FF2B5EF4-FFF2-40B4-BE49-F238E27FC236}">
-                <a16:creationId xmlns:a16="http://schemas.microsoft.com/office/drawing/2014/main" id="{1AE5E192-ADF5-1508-7876-716CB81F3168}"/>
+                <a16:creationId xmlns:a16="http://schemas.microsoft.com/office/drawing/2014/main" id="{7E650628-8585-D9EB-10DD-D7105166605C}"/>
               </a:ext>
             </a:extLst>
           </p:cNvPr>
@@ -2960,7 +2960,7 @@
           <p:cNvPr id="7" name="スライド番号プレースホルダー 6">
             <a:extLst>
               <a:ext uri="{FF2B5EF4-FFF2-40B4-BE49-F238E27FC236}">
-                <a16:creationId xmlns:a16="http://schemas.microsoft.com/office/drawing/2014/main" id="{35E3A409-5924-C774-DEDD-23039747E41C}"/>
+                <a16:creationId xmlns:a16="http://schemas.microsoft.com/office/drawing/2014/main" id="{7381A18F-85D7-F1A7-BDA6-6DE4748A3E22}"/>
               </a:ext>
             </a:extLst>
           </p:cNvPr>
@@ -2976,7 +2976,7 @@
           <a:bodyPr/>
           <a:lstStyle/>
           <a:p>
-            <a:fld id="{58B0269A-8420-4C54-ADE6-B4C01A886CD9}" type="slidenum">
+            <a:fld id="{74AD17F4-8DA2-4325-9390-C894918AC914}" type="slidenum">
               <a:rPr kumimoji="1" lang="ja-JP" altLang="en-US" smtClean="0"/>
               <a:t>‹#›</a:t>
             </a:fld>
@@ -2987,7 +2987,7 @@
     </p:spTree>
     <p:extLst>
       <p:ext uri="{BB962C8B-B14F-4D97-AF65-F5344CB8AC3E}">
-        <p14:creationId xmlns:p14="http://schemas.microsoft.com/office/powerpoint/2010/main" val="1124543001"/>
+        <p14:creationId xmlns:p14="http://schemas.microsoft.com/office/powerpoint/2010/main" val="3521024941"/>
       </p:ext>
     </p:extLst>
   </p:cSld>
@@ -3024,7 +3024,7 @@
           <p:cNvPr id="2" name="タイトル プレースホルダー 1">
             <a:extLst>
               <a:ext uri="{FF2B5EF4-FFF2-40B4-BE49-F238E27FC236}">
-                <a16:creationId xmlns:a16="http://schemas.microsoft.com/office/drawing/2014/main" id="{AF1E53AA-4E34-B613-4816-7BFD0D9C3614}"/>
+                <a16:creationId xmlns:a16="http://schemas.microsoft.com/office/drawing/2014/main" id="{6CEA8BDE-9C1F-8DC3-63FD-07803BE18FD6}"/>
               </a:ext>
             </a:extLst>
           </p:cNvPr>
@@ -3062,7 +3062,7 @@
           <p:cNvPr id="3" name="テキスト プレースホルダー 2">
             <a:extLst>
               <a:ext uri="{FF2B5EF4-FFF2-40B4-BE49-F238E27FC236}">
-                <a16:creationId xmlns:a16="http://schemas.microsoft.com/office/drawing/2014/main" id="{6F451DEB-CEA9-E20B-B661-8AB72C23F3C2}"/>
+                <a16:creationId xmlns:a16="http://schemas.microsoft.com/office/drawing/2014/main" id="{4302076F-9E9C-C10F-F2A9-C66DCD614F8F}"/>
               </a:ext>
             </a:extLst>
           </p:cNvPr>
@@ -3161,7 +3161,7 @@
           <p:cNvPr id="4" name="日付プレースホルダー 3">
             <a:extLst>
               <a:ext uri="{FF2B5EF4-FFF2-40B4-BE49-F238E27FC236}">
-                <a16:creationId xmlns:a16="http://schemas.microsoft.com/office/drawing/2014/main" id="{F5F9406E-EE21-E761-617D-458008E7BD0E}"/>
+                <a16:creationId xmlns:a16="http://schemas.microsoft.com/office/drawing/2014/main" id="{BFC4A734-6733-C111-1706-CC9EFEFDFE03}"/>
               </a:ext>
             </a:extLst>
           </p:cNvPr>
@@ -3195,7 +3195,7 @@
             </a:lvl1pPr>
           </a:lstStyle>
           <a:p>
-            <a:fld id="{A790249F-FB65-43FE-B7F4-EC47FBA5CFDF}" type="datetimeFigureOut">
+            <a:fld id="{75421D55-B1A8-4C83-A1AB-5D9C1CEEC9BF}" type="datetimeFigureOut">
               <a:rPr kumimoji="1" lang="ja-JP" altLang="en-US" smtClean="0"/>
               <a:t>2026/7/30</a:t>
             </a:fld>
@@ -3208,7 +3208,7 @@
           <p:cNvPr id="5" name="フッター プレースホルダー 4">
             <a:extLst>
               <a:ext uri="{FF2B5EF4-FFF2-40B4-BE49-F238E27FC236}">
-                <a16:creationId xmlns:a16="http://schemas.microsoft.com/office/drawing/2014/main" id="{2BD649C6-CA10-C7DC-3570-E5E3C5888B8B}"/>
+                <a16:creationId xmlns:a16="http://schemas.microsoft.com/office/drawing/2014/main" id="{B776577D-0C10-2B91-F143-5712C5594D07}"/>
               </a:ext>
             </a:extLst>
           </p:cNvPr>
@@ -3251,7 +3251,7 @@
           <p:cNvPr id="6" name="スライド番号プレースホルダー 5">
             <a:extLst>
               <a:ext uri="{FF2B5EF4-FFF2-40B4-BE49-F238E27FC236}">
-                <a16:creationId xmlns:a16="http://schemas.microsoft.com/office/drawing/2014/main" id="{BDD2824F-B97B-55BB-09C0-F1AA477891F6}"/>
+                <a16:creationId xmlns:a16="http://schemas.microsoft.com/office/drawing/2014/main" id="{F742FC21-E740-586A-FEEA-263E77065D53}"/>
               </a:ext>
             </a:extLst>
           </p:cNvPr>
@@ -3285,7 +3285,7 @@
             </a:lvl1pPr>
           </a:lstStyle>
           <a:p>
-            <a:fld id="{58B0269A-8420-4C54-ADE6-B4C01A886CD9}" type="slidenum">
+            <a:fld id="{74AD17F4-8DA2-4325-9390-C894918AC914}" type="slidenum">
               <a:rPr kumimoji="1" lang="ja-JP" altLang="en-US" smtClean="0"/>
               <a:t>‹#›</a:t>
             </a:fld>
@@ -3296,7 +3296,7 @@
     </p:spTree>
     <p:extLst>
       <p:ext uri="{BB962C8B-B14F-4D97-AF65-F5344CB8AC3E}">
-        <p14:creationId xmlns:p14="http://schemas.microsoft.com/office/powerpoint/2010/main" val="2422101004"/>
+        <p14:creationId xmlns:p14="http://schemas.microsoft.com/office/powerpoint/2010/main" val="2888816306"/>
       </p:ext>
     </p:extLst>
   </p:cSld>
@@ -3619,7 +3619,7 @@
           <p:cNvPr id="2" name="テキスト ボックス 1">
             <a:extLst>
               <a:ext uri="{FF2B5EF4-FFF2-40B4-BE49-F238E27FC236}">
-                <a16:creationId xmlns:a16="http://schemas.microsoft.com/office/drawing/2014/main" id="{D1D12DF8-8508-FBB6-5ADF-1236DB959B7F}"/>
+                <a16:creationId xmlns:a16="http://schemas.microsoft.com/office/drawing/2014/main" id="{8D7794AD-1AFA-EE83-CCEC-06FDC3766BF6}"/>
               </a:ext>
             </a:extLst>
           </p:cNvPr>
@@ -3665,7 +3665,7 @@
           <p:cNvPr id="3" name="テキスト ボックス 2">
             <a:extLst>
               <a:ext uri="{FF2B5EF4-FFF2-40B4-BE49-F238E27FC236}">
-                <a16:creationId xmlns:a16="http://schemas.microsoft.com/office/drawing/2014/main" id="{78E79C88-A769-91F7-6E98-8B57D6BE3684}"/>
+                <a16:creationId xmlns:a16="http://schemas.microsoft.com/office/drawing/2014/main" id="{B18703D5-E866-AAE4-3C5D-736AA35A65A3}"/>
               </a:ext>
             </a:extLst>
           </p:cNvPr>
@@ -3714,7 +3714,7 @@
           <p:cNvPr id="4" name="テキスト ボックス 3">
             <a:extLst>
               <a:ext uri="{FF2B5EF4-FFF2-40B4-BE49-F238E27FC236}">
-                <a16:creationId xmlns:a16="http://schemas.microsoft.com/office/drawing/2014/main" id="{2C90FDA9-2B3F-65DA-AE4D-EB95570F6837}"/>
+                <a16:creationId xmlns:a16="http://schemas.microsoft.com/office/drawing/2014/main" id="{421DF967-82D0-FC92-7E94-2FBBAF7857A1}"/>
               </a:ext>
             </a:extLst>
           </p:cNvPr>
@@ -3754,7 +3754,7 @@
           <p:cNvPr id="5" name="テキスト ボックス 4">
             <a:extLst>
               <a:ext uri="{FF2B5EF4-FFF2-40B4-BE49-F238E27FC236}">
-                <a16:creationId xmlns:a16="http://schemas.microsoft.com/office/drawing/2014/main" id="{7A73C0F6-472E-2CF9-445E-5AD1EA639137}"/>
+                <a16:creationId xmlns:a16="http://schemas.microsoft.com/office/drawing/2014/main" id="{90E4AB44-CA51-F09C-3AD1-329A903D335B}"/>
               </a:ext>
             </a:extLst>
           </p:cNvPr>
@@ -3801,7 +3801,7 @@
             <a:hlinkClick r:id="" action="ppaction://media"/>
             <a:extLst>
               <a:ext uri="{FF2B5EF4-FFF2-40B4-BE49-F238E27FC236}">
-                <a16:creationId xmlns:a16="http://schemas.microsoft.com/office/drawing/2014/main" id="{96DDC65F-5B73-BDBE-62DF-CAD7DA439874}"/>
+                <a16:creationId xmlns:a16="http://schemas.microsoft.com/office/drawing/2014/main" id="{126A8A44-A2EB-B089-5943-3092D8358F08}"/>
               </a:ext>
             </a:extLst>
           </p:cNvPr>
@@ -3836,7 +3836,7 @@
     </p:spTree>
     <p:extLst>
       <p:ext uri="{BB962C8B-B14F-4D97-AF65-F5344CB8AC3E}">
-        <p14:creationId xmlns:p14="http://schemas.microsoft.com/office/powerpoint/2010/main" val="1787773816"/>
+        <p14:creationId xmlns:p14="http://schemas.microsoft.com/office/powerpoint/2010/main" val="1059630439"/>
       </p:ext>
     </p:extLst>
   </p:cSld>
@@ -3960,7 +3960,7 @@
           <p:cNvPr id="2" name="テキスト ボックス 1">
             <a:extLst>
               <a:ext uri="{FF2B5EF4-FFF2-40B4-BE49-F238E27FC236}">
-                <a16:creationId xmlns:a16="http://schemas.microsoft.com/office/drawing/2014/main" id="{DEBCB6E8-AC41-B229-DD59-29D3C4BB50CA}"/>
+                <a16:creationId xmlns:a16="http://schemas.microsoft.com/office/drawing/2014/main" id="{217DFC8B-EB5E-7DEB-4974-4C810757A5A8}"/>
               </a:ext>
             </a:extLst>
           </p:cNvPr>
@@ -4006,7 +4006,7 @@
           <p:cNvPr id="3" name="テキスト ボックス 2">
             <a:extLst>
               <a:ext uri="{FF2B5EF4-FFF2-40B4-BE49-F238E27FC236}">
-                <a16:creationId xmlns:a16="http://schemas.microsoft.com/office/drawing/2014/main" id="{7E05658C-18BD-A80E-5D3D-331F7B00317B}"/>
+                <a16:creationId xmlns:a16="http://schemas.microsoft.com/office/drawing/2014/main" id="{197ED57F-E132-4973-EEC9-6B18EAAE7CF1}"/>
               </a:ext>
             </a:extLst>
           </p:cNvPr>
@@ -4046,7 +4046,7 @@
           <p:cNvPr id="4" name="テキスト ボックス 3">
             <a:extLst>
               <a:ext uri="{FF2B5EF4-FFF2-40B4-BE49-F238E27FC236}">
-                <a16:creationId xmlns:a16="http://schemas.microsoft.com/office/drawing/2014/main" id="{4269CD49-16F8-2F1B-DDCB-30C6F67AD3C7}"/>
+                <a16:creationId xmlns:a16="http://schemas.microsoft.com/office/drawing/2014/main" id="{B9D5CF06-E3B2-08BA-FB8C-41D3D4FC58D0}"/>
               </a:ext>
             </a:extLst>
           </p:cNvPr>
@@ -4149,7 +4149,7 @@
           <p:cNvPr id="5" name="テキスト ボックス 4">
             <a:extLst>
               <a:ext uri="{FF2B5EF4-FFF2-40B4-BE49-F238E27FC236}">
-                <a16:creationId xmlns:a16="http://schemas.microsoft.com/office/drawing/2014/main" id="{2B5B9A39-500D-312C-AFE0-3BA2F33664B7}"/>
+                <a16:creationId xmlns:a16="http://schemas.microsoft.com/office/drawing/2014/main" id="{67421927-2F8E-88AA-A5C0-D676C6AC32DE}"/>
               </a:ext>
             </a:extLst>
           </p:cNvPr>
@@ -4196,7 +4196,7 @@
             <a:hlinkClick r:id="" action="ppaction://media"/>
             <a:extLst>
               <a:ext uri="{FF2B5EF4-FFF2-40B4-BE49-F238E27FC236}">
-                <a16:creationId xmlns:a16="http://schemas.microsoft.com/office/drawing/2014/main" id="{6417F396-6B93-F3F1-2AA3-F0A0911F9B33}"/>
+                <a16:creationId xmlns:a16="http://schemas.microsoft.com/office/drawing/2014/main" id="{592B48B1-84AF-9638-C444-B363A4784EEA}"/>
               </a:ext>
             </a:extLst>
           </p:cNvPr>
@@ -4231,7 +4231,7 @@
     </p:spTree>
     <p:extLst>
       <p:ext uri="{BB962C8B-B14F-4D97-AF65-F5344CB8AC3E}">
-        <p14:creationId xmlns:p14="http://schemas.microsoft.com/office/powerpoint/2010/main" val="1504339631"/>
+        <p14:creationId xmlns:p14="http://schemas.microsoft.com/office/powerpoint/2010/main" val="3454958813"/>
       </p:ext>
     </p:extLst>
   </p:cSld>
@@ -4355,7 +4355,7 @@
           <p:cNvPr id="2" name="テキスト ボックス 1">
             <a:extLst>
               <a:ext uri="{FF2B5EF4-FFF2-40B4-BE49-F238E27FC236}">
-                <a16:creationId xmlns:a16="http://schemas.microsoft.com/office/drawing/2014/main" id="{8301A1B7-E188-B2D5-B7C0-27CA60A3687A}"/>
+                <a16:creationId xmlns:a16="http://schemas.microsoft.com/office/drawing/2014/main" id="{C7F54457-FCE0-CEFC-6C32-FB278A080B28}"/>
               </a:ext>
             </a:extLst>
           </p:cNvPr>
@@ -4401,7 +4401,7 @@
           <p:cNvPr id="3" name="テキスト ボックス 2">
             <a:extLst>
               <a:ext uri="{FF2B5EF4-FFF2-40B4-BE49-F238E27FC236}">
-                <a16:creationId xmlns:a16="http://schemas.microsoft.com/office/drawing/2014/main" id="{991AE693-1C7C-0AC5-2A7F-C29B0CD370C0}"/>
+                <a16:creationId xmlns:a16="http://schemas.microsoft.com/office/drawing/2014/main" id="{8A9EF299-7035-B005-CA34-C4CF74B342F7}"/>
               </a:ext>
             </a:extLst>
           </p:cNvPr>
@@ -4441,7 +4441,7 @@
           <p:cNvPr id="4" name="テキスト ボックス 3">
             <a:extLst>
               <a:ext uri="{FF2B5EF4-FFF2-40B4-BE49-F238E27FC236}">
-                <a16:creationId xmlns:a16="http://schemas.microsoft.com/office/drawing/2014/main" id="{49923033-FE6B-C742-6C2C-5B800876EF45}"/>
+                <a16:creationId xmlns:a16="http://schemas.microsoft.com/office/drawing/2014/main" id="{F2DB467D-8740-45AF-30D7-3570183A7B2E}"/>
               </a:ext>
             </a:extLst>
           </p:cNvPr>
@@ -4500,7 +4500,7 @@
           <p:cNvPr id="5" name="テキスト ボックス 4">
             <a:extLst>
               <a:ext uri="{FF2B5EF4-FFF2-40B4-BE49-F238E27FC236}">
-                <a16:creationId xmlns:a16="http://schemas.microsoft.com/office/drawing/2014/main" id="{55FF107D-6A0D-C372-9484-1A27B77ED6C1}"/>
+                <a16:creationId xmlns:a16="http://schemas.microsoft.com/office/drawing/2014/main" id="{69E12DDA-CA87-F413-CB0C-1F0B2F49896E}"/>
               </a:ext>
             </a:extLst>
           </p:cNvPr>
@@ -4547,7 +4547,7 @@
             <a:hlinkClick r:id="" action="ppaction://media"/>
             <a:extLst>
               <a:ext uri="{FF2B5EF4-FFF2-40B4-BE49-F238E27FC236}">
-                <a16:creationId xmlns:a16="http://schemas.microsoft.com/office/drawing/2014/main" id="{11402A1B-6E47-37A7-63B4-8CD8F6791F73}"/>
+                <a16:creationId xmlns:a16="http://schemas.microsoft.com/office/drawing/2014/main" id="{225A85AC-0F21-2CF5-9BEC-C41CED5E0794}"/>
               </a:ext>
             </a:extLst>
           </p:cNvPr>
@@ -4582,7 +4582,7 @@
     </p:spTree>
     <p:extLst>
       <p:ext uri="{BB962C8B-B14F-4D97-AF65-F5344CB8AC3E}">
-        <p14:creationId xmlns:p14="http://schemas.microsoft.com/office/powerpoint/2010/main" val="2453627094"/>
+        <p14:creationId xmlns:p14="http://schemas.microsoft.com/office/powerpoint/2010/main" val="3625932191"/>
       </p:ext>
     </p:extLst>
   </p:cSld>
@@ -4706,7 +4706,7 @@
           <p:cNvPr id="2" name="テキスト ボックス 1">
             <a:extLst>
               <a:ext uri="{FF2B5EF4-FFF2-40B4-BE49-F238E27FC236}">
-                <a16:creationId xmlns:a16="http://schemas.microsoft.com/office/drawing/2014/main" id="{06D0494F-F0D2-07FD-9BF9-02B1022C77C6}"/>
+                <a16:creationId xmlns:a16="http://schemas.microsoft.com/office/drawing/2014/main" id="{B0D1DBFB-0A88-D7E1-29E5-CBB1923484BB}"/>
               </a:ext>
             </a:extLst>
           </p:cNvPr>
@@ -4752,7 +4752,7 @@
           <p:cNvPr id="3" name="テキスト ボックス 2">
             <a:extLst>
               <a:ext uri="{FF2B5EF4-FFF2-40B4-BE49-F238E27FC236}">
-                <a16:creationId xmlns:a16="http://schemas.microsoft.com/office/drawing/2014/main" id="{1C4969E7-EAE1-E374-B3BD-ED08A24C0C22}"/>
+                <a16:creationId xmlns:a16="http://schemas.microsoft.com/office/drawing/2014/main" id="{B2418FA0-BF05-5E09-1D86-83FC2AC8E2F7}"/>
               </a:ext>
             </a:extLst>
           </p:cNvPr>
@@ -4792,7 +4792,7 @@
           <p:cNvPr id="4" name="テキスト ボックス 3">
             <a:extLst>
               <a:ext uri="{FF2B5EF4-FFF2-40B4-BE49-F238E27FC236}">
-                <a16:creationId xmlns:a16="http://schemas.microsoft.com/office/drawing/2014/main" id="{9C059FE7-3DDE-F8EA-1305-7BD4CFC20066}"/>
+                <a16:creationId xmlns:a16="http://schemas.microsoft.com/office/drawing/2014/main" id="{42B4BB79-62CA-8834-A59B-4869CB6B2026}"/>
               </a:ext>
             </a:extLst>
           </p:cNvPr>
@@ -4902,7 +4902,7 @@
           <p:cNvPr id="5" name="テキスト ボックス 4">
             <a:extLst>
               <a:ext uri="{FF2B5EF4-FFF2-40B4-BE49-F238E27FC236}">
-                <a16:creationId xmlns:a16="http://schemas.microsoft.com/office/drawing/2014/main" id="{9ACD9802-3EC4-AA3C-AFFA-2A7CB6DE827C}"/>
+                <a16:creationId xmlns:a16="http://schemas.microsoft.com/office/drawing/2014/main" id="{D88E7B53-7360-F4FE-D11F-9B0C704580E8}"/>
               </a:ext>
             </a:extLst>
           </p:cNvPr>
@@ -4949,7 +4949,7 @@
             <a:hlinkClick r:id="" action="ppaction://media"/>
             <a:extLst>
               <a:ext uri="{FF2B5EF4-FFF2-40B4-BE49-F238E27FC236}">
-                <a16:creationId xmlns:a16="http://schemas.microsoft.com/office/drawing/2014/main" id="{249F03F4-4904-656B-5BDE-4571F5A6A6DE}"/>
+                <a16:creationId xmlns:a16="http://schemas.microsoft.com/office/drawing/2014/main" id="{96046EF1-AE5B-65A7-4C4F-2B8555F4D08C}"/>
               </a:ext>
             </a:extLst>
           </p:cNvPr>
@@ -4984,7 +4984,7 @@
     </p:spTree>
     <p:extLst>
       <p:ext uri="{BB962C8B-B14F-4D97-AF65-F5344CB8AC3E}">
-        <p14:creationId xmlns:p14="http://schemas.microsoft.com/office/powerpoint/2010/main" val="3973400995"/>
+        <p14:creationId xmlns:p14="http://schemas.microsoft.com/office/powerpoint/2010/main" val="1925797816"/>
       </p:ext>
     </p:extLst>
   </p:cSld>
@@ -5108,7 +5108,7 @@
           <p:cNvPr id="2" name="テキスト ボックス 1">
             <a:extLst>
               <a:ext uri="{FF2B5EF4-FFF2-40B4-BE49-F238E27FC236}">
-                <a16:creationId xmlns:a16="http://schemas.microsoft.com/office/drawing/2014/main" id="{9219F744-4753-948A-0026-351EF5610A92}"/>
+                <a16:creationId xmlns:a16="http://schemas.microsoft.com/office/drawing/2014/main" id="{A43096FC-BE1F-AC35-8A7A-3308A2876FEE}"/>
               </a:ext>
             </a:extLst>
           </p:cNvPr>
@@ -5154,7 +5154,7 @@
           <p:cNvPr id="3" name="テキスト ボックス 2">
             <a:extLst>
               <a:ext uri="{FF2B5EF4-FFF2-40B4-BE49-F238E27FC236}">
-                <a16:creationId xmlns:a16="http://schemas.microsoft.com/office/drawing/2014/main" id="{2FB75AE2-D0C9-B656-1704-8DD53283F936}"/>
+                <a16:creationId xmlns:a16="http://schemas.microsoft.com/office/drawing/2014/main" id="{35B67D22-B566-91B3-E009-F9EC87119716}"/>
               </a:ext>
             </a:extLst>
           </p:cNvPr>
@@ -5194,7 +5194,7 @@
           <p:cNvPr id="4" name="テキスト ボックス 3">
             <a:extLst>
               <a:ext uri="{FF2B5EF4-FFF2-40B4-BE49-F238E27FC236}">
-                <a16:creationId xmlns:a16="http://schemas.microsoft.com/office/drawing/2014/main" id="{2CBC710E-2B23-370E-4642-6CF34A65ABE8}"/>
+                <a16:creationId xmlns:a16="http://schemas.microsoft.com/office/drawing/2014/main" id="{77D9803F-DE40-D3E5-6606-EE0F19696635}"/>
               </a:ext>
             </a:extLst>
           </p:cNvPr>
@@ -5218,20 +5218,14 @@
           <a:lstStyle/>
           <a:p>
             <a:r>
-              <a:rPr kumimoji="1" lang="en-US" altLang="ja-JP" sz="2000">
+              <a:rPr kumimoji="1" lang="ja-JP" altLang="en-US" sz="2000">
                 <a:solidFill>
                   <a:srgbClr val="333333"/>
                 </a:solidFill>
                 <a:latin typeface="Arial" panose="020B0604020202020204" pitchFamily="34" charset="0"/>
               </a:rPr>
-              <a:t>Build shared GAME PORTAL JP API</a:t>
-            </a:r>
-            <a:endParaRPr kumimoji="1" lang="ja-JP" altLang="en-US" sz="2000">
-              <a:solidFill>
-                <a:srgbClr val="333333"/>
-              </a:solidFill>
-              <a:latin typeface="Arial" panose="020B0604020202020204" pitchFamily="34" charset="0"/>
-            </a:endParaRPr>
+              <a:t>直近のコミットでは、実装の見直しと継続的な改善が行われました。</a:t>
+            </a:r>
           </a:p>
         </p:txBody>
       </p:sp>
@@ -5240,7 +5234,7 @@
           <p:cNvPr id="5" name="テキスト ボックス 4">
             <a:extLst>
               <a:ext uri="{FF2B5EF4-FFF2-40B4-BE49-F238E27FC236}">
-                <a16:creationId xmlns:a16="http://schemas.microsoft.com/office/drawing/2014/main" id="{15BE57CC-FE9E-F4AB-3E1E-716FACEC24D7}"/>
+                <a16:creationId xmlns:a16="http://schemas.microsoft.com/office/drawing/2014/main" id="{4F7E7ABD-924C-A39E-824F-12F41D079D2D}"/>
               </a:ext>
             </a:extLst>
           </p:cNvPr>
@@ -5287,7 +5281,7 @@
             <a:hlinkClick r:id="" action="ppaction://media"/>
             <a:extLst>
               <a:ext uri="{FF2B5EF4-FFF2-40B4-BE49-F238E27FC236}">
-                <a16:creationId xmlns:a16="http://schemas.microsoft.com/office/drawing/2014/main" id="{2FE5B795-71A0-D481-E06D-673FEA269EDF}"/>
+                <a16:creationId xmlns:a16="http://schemas.microsoft.com/office/drawing/2014/main" id="{A87F82F4-DB94-D246-04A8-406C46160007}"/>
               </a:ext>
             </a:extLst>
           </p:cNvPr>
@@ -5322,7 +5316,7 @@
     </p:spTree>
     <p:extLst>
       <p:ext uri="{BB962C8B-B14F-4D97-AF65-F5344CB8AC3E}">
-        <p14:creationId xmlns:p14="http://schemas.microsoft.com/office/powerpoint/2010/main" val="4089671881"/>
+        <p14:creationId xmlns:p14="http://schemas.microsoft.com/office/powerpoint/2010/main" val="913280382"/>
       </p:ext>
     </p:extLst>
   </p:cSld>
@@ -5365,7 +5359,7 @@
                                   <p:childTnLst>
                                     <p:cmd type="call" cmd="playFrom(0.0)">
                                       <p:cBhvr>
-                                        <p:cTn id="6" dur="6981" fill="hold"/>
+                                        <p:cTn id="6" dur="6076" fill="hold"/>
                                         <p:tgtEl>
                                           <p:spTgt spid="6"/>
                                         </p:tgtEl>
@@ -5446,7 +5440,7 @@
           <p:cNvPr id="2" name="テキスト ボックス 1">
             <a:extLst>
               <a:ext uri="{FF2B5EF4-FFF2-40B4-BE49-F238E27FC236}">
-                <a16:creationId xmlns:a16="http://schemas.microsoft.com/office/drawing/2014/main" id="{C585FF94-ABD7-A2CD-9352-459363A06976}"/>
+                <a16:creationId xmlns:a16="http://schemas.microsoft.com/office/drawing/2014/main" id="{B03C7ECC-B8AB-885C-BC4A-27AB5928324D}"/>
               </a:ext>
             </a:extLst>
           </p:cNvPr>
@@ -5492,7 +5486,7 @@
           <p:cNvPr id="3" name="テキスト ボックス 2">
             <a:extLst>
               <a:ext uri="{FF2B5EF4-FFF2-40B4-BE49-F238E27FC236}">
-                <a16:creationId xmlns:a16="http://schemas.microsoft.com/office/drawing/2014/main" id="{94D05954-3FD1-180E-F0A6-7EB164EB7649}"/>
+                <a16:creationId xmlns:a16="http://schemas.microsoft.com/office/drawing/2014/main" id="{7FB0AB7D-42ED-D4B1-9EAE-5BABDA81345C}"/>
               </a:ext>
             </a:extLst>
           </p:cNvPr>
@@ -5532,7 +5526,7 @@
           <p:cNvPr id="4" name="テキスト ボックス 3">
             <a:extLst>
               <a:ext uri="{FF2B5EF4-FFF2-40B4-BE49-F238E27FC236}">
-                <a16:creationId xmlns:a16="http://schemas.microsoft.com/office/drawing/2014/main" id="{BC61C970-A4E1-E1D3-B57F-826AAC54A725}"/>
+                <a16:creationId xmlns:a16="http://schemas.microsoft.com/office/drawing/2014/main" id="{D26D321F-1B15-0637-72C1-892553DDF723}"/>
               </a:ext>
             </a:extLst>
           </p:cNvPr>
@@ -5597,7 +5591,7 @@
           <p:cNvPr id="5" name="テキスト ボックス 4">
             <a:extLst>
               <a:ext uri="{FF2B5EF4-FFF2-40B4-BE49-F238E27FC236}">
-                <a16:creationId xmlns:a16="http://schemas.microsoft.com/office/drawing/2014/main" id="{0D2357D2-1AD6-37BC-CE5D-2F09A64EBE21}"/>
+                <a16:creationId xmlns:a16="http://schemas.microsoft.com/office/drawing/2014/main" id="{D51FA609-B409-B0AF-3885-70C302AAE576}"/>
               </a:ext>
             </a:extLst>
           </p:cNvPr>
@@ -5644,7 +5638,7 @@
             <a:hlinkClick r:id="" action="ppaction://media"/>
             <a:extLst>
               <a:ext uri="{FF2B5EF4-FFF2-40B4-BE49-F238E27FC236}">
-                <a16:creationId xmlns:a16="http://schemas.microsoft.com/office/drawing/2014/main" id="{72745D3F-A480-3F8C-331B-13BE21186CBF}"/>
+                <a16:creationId xmlns:a16="http://schemas.microsoft.com/office/drawing/2014/main" id="{F7D98841-7A3D-BBA3-460A-98A04EB94225}"/>
               </a:ext>
             </a:extLst>
           </p:cNvPr>
@@ -5679,7 +5673,7 @@
     </p:spTree>
     <p:extLst>
       <p:ext uri="{BB962C8B-B14F-4D97-AF65-F5344CB8AC3E}">
-        <p14:creationId xmlns:p14="http://schemas.microsoft.com/office/powerpoint/2010/main" val="3642790281"/>
+        <p14:creationId xmlns:p14="http://schemas.microsoft.com/office/powerpoint/2010/main" val="3752695642"/>
       </p:ext>
     </p:extLst>
   </p:cSld>
